--- a/10-Knowledge-Products/KP1-GEA/videos/module_1/en/decks/KP1_M1_1.2_Deck_v0.2.pptx
+++ b/10-Knowledge-Products/KP1-GEA/videos/module_1/en/decks/KP1_M1_1.2_Deck_v0.2.pptx
@@ -14,14 +14,14 @@
     <p:handoutMasterId r:id="rId47"/>
   </p:handoutMasterIdLst>
   <p:sldIdLst>
-    <p:sldId id="2681" r:id="rId8"/>
-    <p:sldId id="2701" r:id="rId23"/>
     <p:sldId id="2702" r:id="rId24"/>
     <p:sldId id="2703" r:id="rId25"/>
     <p:sldId id="2704" r:id="rId26"/>
     <p:sldId id="2705" r:id="rId27"/>
     <p:sldId id="2706" r:id="rId28"/>
     <p:sldId id="2707" r:id="rId29"/>
+    <p:sldId id="2708" r:id="rId30"/>
+    <p:sldId id="2709" r:id="rId31"/>
   </p:sldIdLst>
   <p:sldSz cx="12192000" cy="6858000"/>
   <p:notesSz cx="6858000" cy="9144000"/>
@@ -933,7 +933,7 @@
           <a:lstStyle/>
           <a:p>
             <a:r>
-              <a:t>VO: Your minister uses the picture to brief cabinet. They cannot describe what the country's digital spend is buying if there is no agreed picture of what your government's systems are. The donor uses the picture before they fund the next programme. They want to see how their investment fits with the others. The vendor uses the picture when they propose a system. They must match what is already there. And you, the middle manager, use the picture to keep all three aligned — so the donor funds what the country needs, the vendor builds what fits, and the minister tells a coherent story.</a:t>
+              <a:t>VO: An Enterprise Architecture is a set of documents and diagrams. Together, they describe how your government works. What services it delivers, and to whom. What data it holds, and who owns it. What software supports those services. What infrastructure runs underneath.</a:t>
             </a:r>
           </a:p>
         </p:txBody>
@@ -1003,13 +1003,25 @@
           <a:lstStyle/>
           <a:p>
             <a:r>
-              <a:t>Rows build top to bottom, cumulative. Order is deliberate — BDAT with data before applications, reflecting data-first architecture.</a:t>
+              <a:t>The bundle folds this comparison onto the video's opening slide; in the deck it keeps its own slide, because the section slide is the standalone video's title card.</a:t>
             </a:r>
           </a:p>
           <a:p/>
           <a:p>
             <a:r>
-              <a:t>VO: Every EA looks at your government in four parts. Services — what your government does, and for whom. This is the layer your minister talks about most, because it is the layer the public sees. Data — the information your government holds, who owns it, where the authoritative copy lives. Data is the longest-lived part of any government. Applications come and go. Technology cycles every decade. Data outlasts them all. Applications — the software that uses that data to deliver those services. This is what gets bought, built, integrated, replaced. Technology — the infrastructure underneath. Networks, hosting, identity, security. The basics that must be running for anything else to work.</a:t>
+              <a:t>VO: An EA is not software. It is not a vendor product. It is not a tool you buy. It is the agreed picture.</a:t>
+            </a:r>
+          </a:p>
+          <a:p/>
+          <a:p>
+            <a:r>
+              <a:t>VO: Why does it matter that everyone has the same picture? Because every important conversation in your ministry breaks down on this point.</a:t>
+            </a:r>
+          </a:p>
+          <a:p/>
+          <a:p>
+            <a:r>
+              <a:t>This slide is the Strategist's first line of defence against vendor pitches — when a vendor says 'our product gives you an EA', this is the slide that says no, it does not.</a:t>
             </a:r>
           </a:p>
         </p:txBody>
@@ -1079,7 +1091,7 @@
           <a:lstStyle/>
           <a:p>
             <a:r>
-              <a:t>VO: When you write down all four parts, your government's digital landscape stops being a list of unrelated projects. It starts looking like a system. A system you can change deliberately. A system you can plan investments against. A system you can talk about across ministries, with donors and with vendors, without re-explaining the basics every time.</a:t>
+              <a:t>VO: Your minister uses the picture to brief cabinet. They cannot describe what the country's digital spend is buying if there is no agreed picture of what your government's systems are. The donor uses the picture before they fund the next programme. They want to see how their investment fits with the others. The vendor uses the picture when they propose a system. They must match what is already there. And you, the middle manager, use the picture to keep all three aligned — so the donor funds what the country needs, the vendor builds what fits, and the minister tells a coherent story.</a:t>
             </a:r>
           </a:p>
         </p:txBody>
@@ -1149,19 +1161,13 @@
           <a:lstStyle/>
           <a:p>
             <a:r>
-              <a:t>PRACTICE BOX (on-screen only — never read it, never paraphrase it, never point at it). It replaces the narrated handoff: this video ends on the recap and the Sources slide.</a:t>
+              <a:t>Rows build top to bottom, cumulative. Order is deliberate — BDAT with data before applications, reflecting data-first architecture.</a:t>
             </a:r>
           </a:p>
           <a:p/>
           <a:p>
             <a:r>
-              <a:t>VO: That is what an Enterprise Architecture is. Not software. Not a tool. The agreed picture of your government — and the tool that lets you, instead of the vendor or the donor, lead the conversation about what comes next.</a:t>
-            </a:r>
-          </a:p>
-          <a:p/>
-          <a:p>
-            <a:r>
-              <a:t>Screenshot-ready summary; Strategists reuse this line in their own briefings.</a:t>
+              <a:t>VO: Every EA looks at your government in four parts. Services — what your government does, and for whom. This is the layer your minister talks about most, because it is the layer the public sees. Data — the information your government holds, who owns it, where the authoritative copy lives. Data is the longest-lived part of any government. Applications come and go. Technology cycles every decade. Data outlasts them all. Applications — the software that uses that data to deliver those services. This is what gets bought, built, integrated, replaced. Technology — the infrastructure underneath. Networks, hosting, identity, security. The basics that must be running for anything else to work.</a:t>
             </a:r>
           </a:p>
         </p:txBody>
@@ -1231,7 +1237,7 @@
           <a:lstStyle/>
           <a:p>
             <a:r>
-              <a:t>Sources slide, held ~5 seconds at the end of the video. Links are compiled into the YouTube description per ITU convention; no URLs read aloud.</a:t>
+              <a:t>VO: When you write down all four parts, your government's digital landscape stops being a list of unrelated projects. It starts looking like a system. A system you can change deliberately. A system you can plan investments against. A system you can talk about across ministries, with donors and with vendors, without re-explaining the basics every time.</a:t>
             </a:r>
           </a:p>
         </p:txBody>
@@ -1256,7 +1262,7 @@
 </p:notes>
 </file>
 
-<file path=ppt/notesSlides/notesSlide21.xml><?xml version="1.0" encoding="utf-8"?>
+<file path=ppt/notesSlides/notesSlide15.xml><?xml version="1.0" encoding="utf-8"?>
 <p:notes xmlns:a="http://schemas.openxmlformats.org/drawingml/2006/main" xmlns:p="http://schemas.openxmlformats.org/presentationml/2006/main" xmlns:r="http://schemas.openxmlformats.org/officeDocument/2006/relationships">
   <p:cSld>
     <p:spTree>
@@ -1301,7 +1307,19 @@
           <a:lstStyle/>
           <a:p>
             <a:r>
-              <a:t>Title card for standalone video 1.2. Content slides are identical to the corresponding section of the combined deck KP1_M1_Deck_v0.2.pptx; voice-over is in each slide’s notes.</a:t>
+              <a:t>PRACTICE BOX (on-screen only — never read it, never paraphrase it, never point at it). It replaces the narrated handoff: this video ends on the recap and the Sources slide.</a:t>
+            </a:r>
+          </a:p>
+          <a:p/>
+          <a:p>
+            <a:r>
+              <a:t>VO: That is what an Enterprise Architecture is. Not software. Not a tool. The agreed picture of your government — and the tool that lets you, instead of the vendor or the donor, lead the conversation about what comes next.</a:t>
+            </a:r>
+          </a:p>
+          <a:p/>
+          <a:p>
+            <a:r>
+              <a:t>Screenshot-ready summary; Strategists reuse this line in their own briefings.</a:t>
             </a:r>
           </a:p>
         </p:txBody>
@@ -1326,7 +1344,7 @@
 </p:notes>
 </file>
 
-<file path=ppt/notesSlides/notesSlide8.xml><?xml version="1.0" encoding="utf-8"?>
+<file path=ppt/notesSlides/notesSlide16.xml><?xml version="1.0" encoding="utf-8"?>
 <p:notes xmlns:a="http://schemas.openxmlformats.org/drawingml/2006/main" xmlns:p="http://schemas.openxmlformats.org/presentationml/2006/main" xmlns:r="http://schemas.openxmlformats.org/officeDocument/2006/relationships">
   <p:cSld>
     <p:spTree>
@@ -1371,7 +1389,7 @@
           <a:lstStyle/>
           <a:p>
             <a:r>
-              <a:t>VO, slide 1: An Enterprise Architecture is a set of documents and diagrams. Together, they describe how your government works. What services it delivers, and to whom. What data it holds, and who owns it. What software supports those services. What infrastructure runs underneath.</a:t>
+              <a:t>Sources slide, held ~5 seconds at the end of the video. Links are compiled into the YouTube description per ITU convention; no URLs read aloud.</a:t>
             </a:r>
           </a:p>
         </p:txBody>
@@ -1441,25 +1459,7 @@
           <a:lstStyle/>
           <a:p>
             <a:r>
-              <a:t>The bundle folds this comparison onto the video's opening slide; in the deck it keeps its own slide, because the section slide is the standalone video's title card.</a:t>
-            </a:r>
-          </a:p>
-          <a:p/>
-          <a:p>
-            <a:r>
-              <a:t>VO: An EA is not software. It is not a vendor product. It is not a tool you buy. It is the agreed picture.</a:t>
-            </a:r>
-          </a:p>
-          <a:p/>
-          <a:p>
-            <a:r>
-              <a:t>VO: Why does it matter that everyone has the same picture? Because every important conversation in your ministry breaks down on this point.</a:t>
-            </a:r>
-          </a:p>
-          <a:p/>
-          <a:p>
-            <a:r>
-              <a:t>This slide is the Strategist's first line of defence against vendor pitches — when a vendor says 'our product gives you an EA', this is the slide that says no, it does not.</a:t>
+              <a:t>Title card — the cold open. The hosts name the module, the video number, the title and the single message on this slide; no scripted narration. Hold until the opener begins; the opener is narrated on the next slide.</a:t>
             </a:r>
           </a:p>
         </p:txBody>
@@ -11620,894 +11620,6 @@
 </p:sldMaster>
 </file>
 
-<file path=ppt/slides/slide1.xml><?xml version="1.0" encoding="utf-8"?>
-<p:sld xmlns:a="http://schemas.openxmlformats.org/drawingml/2006/main" xmlns:r="http://schemas.openxmlformats.org/officeDocument/2006/relationships" xmlns:p="http://schemas.openxmlformats.org/presentationml/2006/main">
-  <p:cSld>
-    <p:spTree>
-      <p:nvGrpSpPr>
-        <p:cNvPr id="1" name=""/>
-        <p:cNvGrpSpPr/>
-        <p:nvPr/>
-      </p:nvGrpSpPr>
-      <p:grpSpPr>
-        <a:xfrm>
-          <a:off x="0" y="0"/>
-          <a:ext cx="0" cy="0"/>
-          <a:chOff x="0" y="0"/>
-          <a:chExt cx="0" cy="0"/>
-        </a:xfrm>
-      </p:grpSpPr>
-      <p:cxnSp>
-        <p:nvCxnSpPr>
-          <p:cNvPr id="11" name="Straight Connector 10">
-            <a:extLst>
-              <a:ext uri="{FF2B5EF4-FFF2-40B4-BE49-F238E27FC236}">
-                <a16:creationId xmlns:a16="http://schemas.microsoft.com/office/drawing/2014/main" id="{D9AD66F2-F7C0-4D03-9150-D28F17AC561D}"/>
-              </a:ext>
-            </a:extLst>
-          </p:cNvPr>
-          <p:cNvCxnSpPr>
-            <a:cxnSpLocks/>
-          </p:cNvCxnSpPr>
-          <p:nvPr/>
-        </p:nvCxnSpPr>
-        <p:spPr>
-          <a:xfrm>
-            <a:off x="373021" y="2198718"/>
-            <a:ext cx="6843567" cy="0"/>
-          </a:xfrm>
-          <a:prstGeom prst="line">
-            <a:avLst/>
-          </a:prstGeom>
-          <a:ln w="12700">
-            <a:solidFill>
-              <a:srgbClr val="009CD6"/>
-            </a:solidFill>
-          </a:ln>
-        </p:spPr>
-        <p:style>
-          <a:lnRef idx="1">
-            <a:schemeClr val="accent1"/>
-          </a:lnRef>
-          <a:fillRef idx="0">
-            <a:schemeClr val="accent1"/>
-          </a:fillRef>
-          <a:effectRef idx="0">
-            <a:schemeClr val="accent1"/>
-          </a:effectRef>
-          <a:fontRef idx="minor">
-            <a:schemeClr val="tx1"/>
-          </a:fontRef>
-        </p:style>
-      </p:cxnSp>
-      <p:sp>
-        <p:nvSpPr>
-          <p:cNvPr id="12" name="Title 9">
-            <a:extLst>
-              <a:ext uri="{FF2B5EF4-FFF2-40B4-BE49-F238E27FC236}">
-                <a16:creationId xmlns:a16="http://schemas.microsoft.com/office/drawing/2014/main" id="{EEB08032-CE0E-4986-AEDF-A41026C0E8B9}"/>
-              </a:ext>
-            </a:extLst>
-          </p:cNvPr>
-          <p:cNvSpPr txBox="1">
-            <a:spLocks/>
-          </p:cNvSpPr>
-          <p:nvPr/>
-        </p:nvSpPr>
-        <p:spPr>
-          <a:xfrm>
-            <a:off x="237734" y="702833"/>
-            <a:ext cx="6432007" cy="1218817"/>
-          </a:xfrm>
-          <a:prstGeom prst="rect">
-            <a:avLst/>
-          </a:prstGeom>
-        </p:spPr>
-        <p:txBody>
-          <a:bodyPr anchor="b" wrap="square">
-            <a:noAutofit/>
-          </a:bodyPr>
-          <a:lstStyle>
-            <a:lvl1pPr algn="l" defTabSz="914400" rtl="0" eaLnBrk="1" latinLnBrk="0" hangingPunct="1">
-              <a:lnSpc>
-                <a:spcPct val="90000"/>
-              </a:lnSpc>
-              <a:spcBef>
-                <a:spcPct val="0"/>
-              </a:spcBef>
-              <a:buNone/>
-              <a:defRPr sz="4000" kern="1200">
-                <a:solidFill>
-                  <a:schemeClr val="bg1"/>
-                </a:solidFill>
-                <a:latin typeface="Arial" panose="020B0604020202020204" pitchFamily="34" charset="0"/>
-                <a:ea typeface="+mj-ea"/>
-                <a:cs typeface="Arial" panose="020B0604020202020204" pitchFamily="34" charset="0"/>
-              </a:defRPr>
-            </a:lvl1pPr>
-          </a:lstStyle>
-          <a:p>
-            <a:r>
-              <a:rPr sz="2800" b="1" i="0">
-                <a:solidFill>
-                  <a:srgbClr val="1A1A1A"/>
-                </a:solidFill>
-                <a:latin typeface="Arial"/>
-              </a:rPr>
-              <a:t>1.2 — What an EA actually is</a:t>
-            </a:r>
-          </a:p>
-        </p:txBody>
-      </p:sp>
-      <p:pic>
-        <p:nvPicPr>
-          <p:cNvPr id="7" name="Picture 6">
-            <a:extLst>
-              <a:ext uri="{FF2B5EF4-FFF2-40B4-BE49-F238E27FC236}">
-                <a16:creationId xmlns:a16="http://schemas.microsoft.com/office/drawing/2014/main" id="{A2066351-C569-4C4C-A096-308777FCDC32}"/>
-              </a:ext>
-            </a:extLst>
-          </p:cNvPr>
-          <p:cNvPicPr>
-            <a:picLocks noChangeAspect="1"/>
-          </p:cNvPicPr>
-          <p:nvPr/>
-        </p:nvPicPr>
-        <p:blipFill>
-          <a:blip r:embed="rId2">
-            <a:extLst>
-              <a:ext uri="{28A0092B-C50C-407E-A947-70E740481C1C}">
-                <a14:useLocalDpi xmlns:a14="http://schemas.microsoft.com/office/drawing/2010/main" val="0"/>
-              </a:ext>
-            </a:extLst>
-          </a:blip>
-          <a:srcRect t="20219" b="14729"/>
-          <a:stretch>
-            <a:fillRect/>
-          </a:stretch>
-        </p:blipFill>
-        <p:spPr>
-          <a:xfrm>
-            <a:off x="0" y="5620871"/>
-            <a:ext cx="1323975" cy="1218816"/>
-          </a:xfrm>
-          <a:prstGeom prst="rect">
-            <a:avLst/>
-          </a:prstGeom>
-        </p:spPr>
-      </p:pic>
-      <p:sp>
-        <p:nvSpPr>
-          <p:cNvPr id="14" name="Title 9">
-            <a:extLst>
-              <a:ext uri="{FF2B5EF4-FFF2-40B4-BE49-F238E27FC236}">
-                <a16:creationId xmlns:a16="http://schemas.microsoft.com/office/drawing/2014/main" id="{B5087B80-3EE4-1881-0130-ED58CA625092}"/>
-              </a:ext>
-            </a:extLst>
-          </p:cNvPr>
-          <p:cNvSpPr txBox="1">
-            <a:spLocks/>
-          </p:cNvSpPr>
-          <p:nvPr/>
-        </p:nvSpPr>
-        <p:spPr>
-          <a:xfrm>
-            <a:off x="284452" y="2475786"/>
-            <a:ext cx="6382893" cy="953213"/>
-          </a:xfrm>
-          <a:prstGeom prst="rect">
-            <a:avLst/>
-          </a:prstGeom>
-        </p:spPr>
-        <p:txBody>
-          <a:bodyPr anchor="t" wrap="square">
-            <a:noAutofit/>
-          </a:bodyPr>
-          <a:lstStyle>
-            <a:lvl1pPr algn="l" defTabSz="914400" rtl="0" eaLnBrk="1" latinLnBrk="0" hangingPunct="1">
-              <a:lnSpc>
-                <a:spcPct val="90000"/>
-              </a:lnSpc>
-              <a:spcBef>
-                <a:spcPct val="0"/>
-              </a:spcBef>
-              <a:buNone/>
-              <a:defRPr sz="4000" kern="1200">
-                <a:solidFill>
-                  <a:schemeClr val="bg1"/>
-                </a:solidFill>
-                <a:latin typeface="Arial" panose="020B0604020202020204" pitchFamily="34" charset="0"/>
-                <a:ea typeface="+mj-ea"/>
-                <a:cs typeface="Arial" panose="020B0604020202020204" pitchFamily="34" charset="0"/>
-              </a:defRPr>
-            </a:lvl1pPr>
-          </a:lstStyle>
-          <a:p>
-            <a:pPr marL="0" marR="0" lvl="0" indent="0" rtl="0">
-              <a:spcBef>
-                <a:spcPts val="600"/>
-              </a:spcBef>
-              <a:spcAft>
-                <a:spcPts val="600"/>
-              </a:spcAft>
-              <a:buNone/>
-            </a:pPr>
-            <a:r>
-              <a:rPr sz="1300" b="1" i="0">
-                <a:solidFill>
-                  <a:srgbClr val="006E96"/>
-                </a:solidFill>
-                <a:latin typeface="Arial"/>
-              </a:rPr>
-              <a:t>KP1 · Government Enterprise Architecture · Module 1 · Video 1.2</a:t>
-            </a:r>
-          </a:p>
-          <a:p>
-            <a:r>
-              <a:rPr sz="1200" b="0" i="1">
-                <a:solidFill>
-                  <a:srgbClr val="595959"/>
-                </a:solidFill>
-                <a:latin typeface="Arial"/>
-              </a:rPr>
-              <a:t>An EA is the picture everyone agrees describes your government — minister, ministry CIO, donor, vendor. With it, you can lead the conversation. Without it, others lead it for you.</a:t>
-            </a:r>
-          </a:p>
-        </p:txBody>
-      </p:sp>
-      <p:sp>
-        <p:nvSpPr>
-          <p:cNvPr id="17" name="Title 9">
-            <a:extLst>
-              <a:ext uri="{FF2B5EF4-FFF2-40B4-BE49-F238E27FC236}">
-                <a16:creationId xmlns:a16="http://schemas.microsoft.com/office/drawing/2014/main" id="{5E8796F7-DD26-D250-5E97-B38B22298E72}"/>
-              </a:ext>
-            </a:extLst>
-          </p:cNvPr>
-          <p:cNvSpPr txBox="1">
-            <a:spLocks/>
-          </p:cNvSpPr>
-          <p:nvPr/>
-        </p:nvSpPr>
-        <p:spPr>
-          <a:xfrm>
-            <a:off x="284452" y="4363897"/>
-            <a:ext cx="6382893" cy="953213"/>
-          </a:xfrm>
-          <a:prstGeom prst="rect">
-            <a:avLst/>
-          </a:prstGeom>
-        </p:spPr>
-        <p:txBody>
-          <a:bodyPr anchor="t" wrap="square">
-            <a:noAutofit/>
-          </a:bodyPr>
-          <a:lstStyle>
-            <a:lvl1pPr algn="l" defTabSz="914400" rtl="0" eaLnBrk="1" latinLnBrk="0" hangingPunct="1">
-              <a:lnSpc>
-                <a:spcPct val="90000"/>
-              </a:lnSpc>
-              <a:spcBef>
-                <a:spcPct val="0"/>
-              </a:spcBef>
-              <a:buNone/>
-              <a:defRPr sz="4000" kern="1200">
-                <a:solidFill>
-                  <a:schemeClr val="bg1"/>
-                </a:solidFill>
-                <a:latin typeface="Arial" panose="020B0604020202020204" pitchFamily="34" charset="0"/>
-                <a:ea typeface="+mj-ea"/>
-                <a:cs typeface="Arial" panose="020B0604020202020204" pitchFamily="34" charset="0"/>
-              </a:defRPr>
-            </a:lvl1pPr>
-          </a:lstStyle>
-          <a:p>
-            <a:pPr marL="0" marR="0" lvl="0" indent="0" rtl="0">
-              <a:spcBef>
-                <a:spcPts val="600"/>
-              </a:spcBef>
-              <a:spcAft>
-                <a:spcPts val="400"/>
-              </a:spcAft>
-              <a:buNone/>
-            </a:pPr>
-            <a:r>
-              <a:rPr sz="1400" b="1" i="0">
-                <a:solidFill>
-                  <a:srgbClr val="1A1A1A"/>
-                </a:solidFill>
-                <a:latin typeface="Arial"/>
-              </a:rPr>
-              <a:t>Target audience: </a:t>
-            </a:r>
-            <a:r>
-              <a:rPr sz="1400" b="0" i="0">
-                <a:solidFill>
-                  <a:srgbClr val="1A1A1A"/>
-                </a:solidFill>
-                <a:latin typeface="Arial"/>
-              </a:rPr>
-              <a:t>CDO · Director-General · sector minister</a:t>
-            </a:r>
-          </a:p>
-        </p:txBody>
-      </p:sp>
-      <p:sp>
-        <p:nvSpPr>
-          <p:cNvPr id="18" name="Rectangle 17"/>
-          <p:cNvSpPr/>
-          <p:nvPr/>
-        </p:nvSpPr>
-        <p:spPr>
-          <a:xfrm>
-            <a:off x="7022592" y="0"/>
-            <a:ext cx="5169103" cy="6858000"/>
-          </a:xfrm>
-          <a:prstGeom prst="rect">
-            <a:avLst/>
-          </a:prstGeom>
-          <a:solidFill>
-            <a:srgbClr val="009CD6"/>
-          </a:solidFill>
-          <a:ln>
-            <a:noFill/>
-          </a:ln>
-          <a:effectLst/>
-        </p:spPr>
-        <p:style>
-          <a:lnRef idx="1">
-            <a:schemeClr val="accent1"/>
-          </a:lnRef>
-          <a:fillRef idx="3">
-            <a:schemeClr val="accent1"/>
-          </a:fillRef>
-          <a:effectRef idx="2">
-            <a:schemeClr val="accent1"/>
-          </a:effectRef>
-          <a:fontRef idx="minor">
-            <a:schemeClr val="lt1"/>
-          </a:fontRef>
-        </p:style>
-        <p:txBody>
-          <a:bodyPr rtlCol="0" anchor="ctr"/>
-          <a:lstStyle/>
-          <a:p>
-            <a:pPr algn="ctr"/>
-          </a:p>
-        </p:txBody>
-      </p:sp>
-      <p:sp>
-        <p:nvSpPr>
-          <p:cNvPr id="19" name="TextBox 18"/>
-          <p:cNvSpPr txBox="1"/>
-          <p:nvPr/>
-        </p:nvSpPr>
-        <p:spPr>
-          <a:xfrm>
-            <a:off x="7452360" y="457200"/>
-            <a:ext cx="4297680" cy="457200"/>
-          </a:xfrm>
-          <a:prstGeom prst="rect">
-            <a:avLst/>
-          </a:prstGeom>
-          <a:noFill/>
-        </p:spPr>
-        <p:txBody>
-          <a:bodyPr wrap="square">
-            <a:spAutoFit/>
-          </a:bodyPr>
-          <a:lstStyle/>
-          <a:p>
-            <a:r>
-              <a:rPr sz="1100" b="1" i="0">
-                <a:solidFill>
-                  <a:srgbClr val="E5F5FB"/>
-                </a:solidFill>
-                <a:latin typeface="Arial"/>
-              </a:rPr>
-              <a:t>THE LIFECYCLE THIS MODULE TEACHES</a:t>
-            </a:r>
-          </a:p>
-        </p:txBody>
-      </p:sp>
-      <p:sp>
-        <p:nvSpPr>
-          <p:cNvPr id="20" name="Rounded Rectangle 19"/>
-          <p:cNvSpPr/>
-          <p:nvPr/>
-        </p:nvSpPr>
-        <p:spPr>
-          <a:xfrm>
-            <a:off x="7452360" y="960120"/>
-            <a:ext cx="3840480" cy="658368"/>
-          </a:xfrm>
-          <a:prstGeom prst="roundRect">
-            <a:avLst>
-              <a:gd name="adj" fmla="val 14000"/>
-            </a:avLst>
-          </a:prstGeom>
-          <a:solidFill>
-            <a:srgbClr val="FFFFFF"/>
-          </a:solidFill>
-          <a:ln>
-            <a:noFill/>
-          </a:ln>
-          <a:effectLst/>
-        </p:spPr>
-        <p:style>
-          <a:lnRef idx="1">
-            <a:schemeClr val="accent1"/>
-          </a:lnRef>
-          <a:fillRef idx="3">
-            <a:schemeClr val="accent1"/>
-          </a:fillRef>
-          <a:effectRef idx="2">
-            <a:schemeClr val="accent1"/>
-          </a:effectRef>
-          <a:fontRef idx="minor">
-            <a:schemeClr val="lt1"/>
-          </a:fontRef>
-        </p:style>
-        <p:txBody>
-          <a:bodyPr rtlCol="0" anchor="ctr" lIns="164592" wrap="square"/>
-          <a:lstStyle/>
-          <a:p>
-            <a:pPr algn="ctr"/>
-            <a:r>
-              <a:rPr sz="1500" b="1" i="0">
-                <a:solidFill>
-                  <a:srgbClr val="1A1A1A"/>
-                </a:solidFill>
-                <a:latin typeface="Arial"/>
-              </a:rPr>
-              <a:t>Discover</a:t>
-            </a:r>
-          </a:p>
-        </p:txBody>
-      </p:sp>
-      <p:sp>
-        <p:nvSpPr>
-          <p:cNvPr id="21" name="Diamond 20"/>
-          <p:cNvSpPr/>
-          <p:nvPr/>
-        </p:nvSpPr>
-        <p:spPr>
-          <a:xfrm>
-            <a:off x="7333488" y="1677924"/>
-            <a:ext cx="128016" cy="128016"/>
-          </a:xfrm>
-          <a:prstGeom prst="diamond">
-            <a:avLst/>
-          </a:prstGeom>
-          <a:solidFill>
-            <a:srgbClr val="E5F5FB"/>
-          </a:solidFill>
-          <a:ln>
-            <a:noFill/>
-          </a:ln>
-          <a:effectLst/>
-        </p:spPr>
-        <p:style>
-          <a:lnRef idx="1">
-            <a:schemeClr val="accent1"/>
-          </a:lnRef>
-          <a:fillRef idx="3">
-            <a:schemeClr val="accent1"/>
-          </a:fillRef>
-          <a:effectRef idx="2">
-            <a:schemeClr val="accent1"/>
-          </a:effectRef>
-          <a:fontRef idx="minor">
-            <a:schemeClr val="lt1"/>
-          </a:fontRef>
-        </p:style>
-        <p:txBody>
-          <a:bodyPr rtlCol="0" anchor="ctr"/>
-          <a:lstStyle/>
-          <a:p>
-            <a:pPr algn="ctr"/>
-          </a:p>
-        </p:txBody>
-      </p:sp>
-      <p:sp>
-        <p:nvSpPr>
-          <p:cNvPr id="22" name="Rounded Rectangle 21"/>
-          <p:cNvSpPr/>
-          <p:nvPr/>
-        </p:nvSpPr>
-        <p:spPr>
-          <a:xfrm>
-            <a:off x="7452360" y="1892808"/>
-            <a:ext cx="3840480" cy="658368"/>
-          </a:xfrm>
-          <a:prstGeom prst="roundRect">
-            <a:avLst>
-              <a:gd name="adj" fmla="val 14000"/>
-            </a:avLst>
-          </a:prstGeom>
-          <a:solidFill>
-            <a:srgbClr val="FFFFFF"/>
-          </a:solidFill>
-          <a:ln>
-            <a:noFill/>
-          </a:ln>
-          <a:effectLst/>
-        </p:spPr>
-        <p:style>
-          <a:lnRef idx="1">
-            <a:schemeClr val="accent1"/>
-          </a:lnRef>
-          <a:fillRef idx="3">
-            <a:schemeClr val="accent1"/>
-          </a:fillRef>
-          <a:effectRef idx="2">
-            <a:schemeClr val="accent1"/>
-          </a:effectRef>
-          <a:fontRef idx="minor">
-            <a:schemeClr val="lt1"/>
-          </a:fontRef>
-        </p:style>
-        <p:txBody>
-          <a:bodyPr rtlCol="0" anchor="ctr" lIns="164592" wrap="square"/>
-          <a:lstStyle/>
-          <a:p>
-            <a:pPr algn="ctr"/>
-            <a:r>
-              <a:rPr sz="1500" b="1" i="0">
-                <a:solidFill>
-                  <a:srgbClr val="1A1A1A"/>
-                </a:solidFill>
-                <a:latin typeface="Arial"/>
-              </a:rPr>
-              <a:t>Assess</a:t>
-            </a:r>
-          </a:p>
-        </p:txBody>
-      </p:sp>
-      <p:sp>
-        <p:nvSpPr>
-          <p:cNvPr id="23" name="Diamond 22"/>
-          <p:cNvSpPr/>
-          <p:nvPr/>
-        </p:nvSpPr>
-        <p:spPr>
-          <a:xfrm>
-            <a:off x="7333488" y="2610612"/>
-            <a:ext cx="128016" cy="128016"/>
-          </a:xfrm>
-          <a:prstGeom prst="diamond">
-            <a:avLst/>
-          </a:prstGeom>
-          <a:solidFill>
-            <a:srgbClr val="E5F5FB"/>
-          </a:solidFill>
-          <a:ln>
-            <a:noFill/>
-          </a:ln>
-          <a:effectLst/>
-        </p:spPr>
-        <p:style>
-          <a:lnRef idx="1">
-            <a:schemeClr val="accent1"/>
-          </a:lnRef>
-          <a:fillRef idx="3">
-            <a:schemeClr val="accent1"/>
-          </a:fillRef>
-          <a:effectRef idx="2">
-            <a:schemeClr val="accent1"/>
-          </a:effectRef>
-          <a:fontRef idx="minor">
-            <a:schemeClr val="lt1"/>
-          </a:fontRef>
-        </p:style>
-        <p:txBody>
-          <a:bodyPr rtlCol="0" anchor="ctr"/>
-          <a:lstStyle/>
-          <a:p>
-            <a:pPr algn="ctr"/>
-          </a:p>
-        </p:txBody>
-      </p:sp>
-      <p:sp>
-        <p:nvSpPr>
-          <p:cNvPr id="24" name="Rounded Rectangle 23"/>
-          <p:cNvSpPr/>
-          <p:nvPr/>
-        </p:nvSpPr>
-        <p:spPr>
-          <a:xfrm>
-            <a:off x="7452360" y="2825496"/>
-            <a:ext cx="3840480" cy="658368"/>
-          </a:xfrm>
-          <a:prstGeom prst="roundRect">
-            <a:avLst>
-              <a:gd name="adj" fmla="val 14000"/>
-            </a:avLst>
-          </a:prstGeom>
-          <a:solidFill>
-            <a:srgbClr val="FFFFFF"/>
-          </a:solidFill>
-          <a:ln>
-            <a:noFill/>
-          </a:ln>
-          <a:effectLst/>
-        </p:spPr>
-        <p:style>
-          <a:lnRef idx="1">
-            <a:schemeClr val="accent1"/>
-          </a:lnRef>
-          <a:fillRef idx="3">
-            <a:schemeClr val="accent1"/>
-          </a:fillRef>
-          <a:effectRef idx="2">
-            <a:schemeClr val="accent1"/>
-          </a:effectRef>
-          <a:fontRef idx="minor">
-            <a:schemeClr val="lt1"/>
-          </a:fontRef>
-        </p:style>
-        <p:txBody>
-          <a:bodyPr rtlCol="0" anchor="ctr" lIns="164592" wrap="square"/>
-          <a:lstStyle/>
-          <a:p>
-            <a:pPr algn="ctr"/>
-            <a:r>
-              <a:rPr sz="1500" b="1" i="0">
-                <a:solidFill>
-                  <a:srgbClr val="1A1A1A"/>
-                </a:solidFill>
-                <a:latin typeface="Arial"/>
-              </a:rPr>
-              <a:t>Adapt</a:t>
-            </a:r>
-          </a:p>
-        </p:txBody>
-      </p:sp>
-      <p:sp>
-        <p:nvSpPr>
-          <p:cNvPr id="25" name="Diamond 24"/>
-          <p:cNvSpPr/>
-          <p:nvPr/>
-        </p:nvSpPr>
-        <p:spPr>
-          <a:xfrm>
-            <a:off x="7333488" y="3543300"/>
-            <a:ext cx="128016" cy="128016"/>
-          </a:xfrm>
-          <a:prstGeom prst="diamond">
-            <a:avLst/>
-          </a:prstGeom>
-          <a:solidFill>
-            <a:srgbClr val="E5F5FB"/>
-          </a:solidFill>
-          <a:ln>
-            <a:noFill/>
-          </a:ln>
-          <a:effectLst/>
-        </p:spPr>
-        <p:style>
-          <a:lnRef idx="1">
-            <a:schemeClr val="accent1"/>
-          </a:lnRef>
-          <a:fillRef idx="3">
-            <a:schemeClr val="accent1"/>
-          </a:fillRef>
-          <a:effectRef idx="2">
-            <a:schemeClr val="accent1"/>
-          </a:effectRef>
-          <a:fontRef idx="minor">
-            <a:schemeClr val="lt1"/>
-          </a:fontRef>
-        </p:style>
-        <p:txBody>
-          <a:bodyPr rtlCol="0" anchor="ctr"/>
-          <a:lstStyle/>
-          <a:p>
-            <a:pPr algn="ctr"/>
-          </a:p>
-        </p:txBody>
-      </p:sp>
-      <p:sp>
-        <p:nvSpPr>
-          <p:cNvPr id="26" name="Rounded Rectangle 25"/>
-          <p:cNvSpPr/>
-          <p:nvPr/>
-        </p:nvSpPr>
-        <p:spPr>
-          <a:xfrm>
-            <a:off x="7452360" y="3758184"/>
-            <a:ext cx="3840480" cy="658368"/>
-          </a:xfrm>
-          <a:prstGeom prst="roundRect">
-            <a:avLst>
-              <a:gd name="adj" fmla="val 14000"/>
-            </a:avLst>
-          </a:prstGeom>
-          <a:solidFill>
-            <a:srgbClr val="FFFFFF"/>
-          </a:solidFill>
-          <a:ln>
-            <a:noFill/>
-          </a:ln>
-          <a:effectLst/>
-        </p:spPr>
-        <p:style>
-          <a:lnRef idx="1">
-            <a:schemeClr val="accent1"/>
-          </a:lnRef>
-          <a:fillRef idx="3">
-            <a:schemeClr val="accent1"/>
-          </a:fillRef>
-          <a:effectRef idx="2">
-            <a:schemeClr val="accent1"/>
-          </a:effectRef>
-          <a:fontRef idx="minor">
-            <a:schemeClr val="lt1"/>
-          </a:fontRef>
-        </p:style>
-        <p:txBody>
-          <a:bodyPr rtlCol="0" anchor="ctr" lIns="164592" wrap="square"/>
-          <a:lstStyle/>
-          <a:p>
-            <a:pPr algn="ctr"/>
-            <a:r>
-              <a:rPr sz="1500" b="1" i="0">
-                <a:solidFill>
-                  <a:srgbClr val="1A1A1A"/>
-                </a:solidFill>
-                <a:latin typeface="Arial"/>
-              </a:rPr>
-              <a:t>Plan</a:t>
-            </a:r>
-          </a:p>
-        </p:txBody>
-      </p:sp>
-      <p:sp>
-        <p:nvSpPr>
-          <p:cNvPr id="27" name="Diamond 26"/>
-          <p:cNvSpPr/>
-          <p:nvPr/>
-        </p:nvSpPr>
-        <p:spPr>
-          <a:xfrm>
-            <a:off x="7333488" y="4475988"/>
-            <a:ext cx="128016" cy="128016"/>
-          </a:xfrm>
-          <a:prstGeom prst="diamond">
-            <a:avLst/>
-          </a:prstGeom>
-          <a:solidFill>
-            <a:srgbClr val="E5F5FB"/>
-          </a:solidFill>
-          <a:ln>
-            <a:noFill/>
-          </a:ln>
-          <a:effectLst/>
-        </p:spPr>
-        <p:style>
-          <a:lnRef idx="1">
-            <a:schemeClr val="accent1"/>
-          </a:lnRef>
-          <a:fillRef idx="3">
-            <a:schemeClr val="accent1"/>
-          </a:fillRef>
-          <a:effectRef idx="2">
-            <a:schemeClr val="accent1"/>
-          </a:effectRef>
-          <a:fontRef idx="minor">
-            <a:schemeClr val="lt1"/>
-          </a:fontRef>
-        </p:style>
-        <p:txBody>
-          <a:bodyPr rtlCol="0" anchor="ctr"/>
-          <a:lstStyle/>
-          <a:p>
-            <a:pPr algn="ctr"/>
-          </a:p>
-        </p:txBody>
-      </p:sp>
-      <p:sp>
-        <p:nvSpPr>
-          <p:cNvPr id="28" name="Rounded Rectangle 27"/>
-          <p:cNvSpPr/>
-          <p:nvPr/>
-        </p:nvSpPr>
-        <p:spPr>
-          <a:xfrm>
-            <a:off x="7452360" y="4690872"/>
-            <a:ext cx="3840480" cy="658368"/>
-          </a:xfrm>
-          <a:prstGeom prst="roundRect">
-            <a:avLst>
-              <a:gd name="adj" fmla="val 14000"/>
-            </a:avLst>
-          </a:prstGeom>
-          <a:solidFill>
-            <a:srgbClr val="006E96"/>
-          </a:solidFill>
-          <a:ln>
-            <a:noFill/>
-          </a:ln>
-          <a:effectLst/>
-        </p:spPr>
-        <p:style>
-          <a:lnRef idx="1">
-            <a:schemeClr val="accent1"/>
-          </a:lnRef>
-          <a:fillRef idx="3">
-            <a:schemeClr val="accent1"/>
-          </a:fillRef>
-          <a:effectRef idx="2">
-            <a:schemeClr val="accent1"/>
-          </a:effectRef>
-          <a:fontRef idx="minor">
-            <a:schemeClr val="lt1"/>
-          </a:fontRef>
-        </p:style>
-        <p:txBody>
-          <a:bodyPr rtlCol="0" anchor="ctr" lIns="164592" wrap="square"/>
-          <a:lstStyle/>
-          <a:p>
-            <a:pPr algn="ctr"/>
-            <a:r>
-              <a:rPr sz="1500" b="1" i="0">
-                <a:solidFill>
-                  <a:srgbClr val="FFFFFF"/>
-                </a:solidFill>
-                <a:latin typeface="Arial"/>
-              </a:rPr>
-              <a:t>Execute &amp; Govern</a:t>
-            </a:r>
-          </a:p>
-        </p:txBody>
-      </p:sp>
-      <p:sp>
-        <p:nvSpPr>
-          <p:cNvPr id="29" name="TextBox 28"/>
-          <p:cNvSpPr txBox="1"/>
-          <p:nvPr/>
-        </p:nvSpPr>
-        <p:spPr>
-          <a:xfrm>
-            <a:off x="7452360" y="5806440"/>
-            <a:ext cx="4297680" cy="731520"/>
-          </a:xfrm>
-          <a:prstGeom prst="rect">
-            <a:avLst/>
-          </a:prstGeom>
-          <a:noFill/>
-        </p:spPr>
-        <p:txBody>
-          <a:bodyPr wrap="square">
-            <a:spAutoFit/>
-          </a:bodyPr>
-          <a:lstStyle/>
-          <a:p>
-            <a:r>
-              <a:rPr sz="1200" b="0" i="0">
-                <a:solidFill>
-                  <a:srgbClr val="FFFFFF"/>
-                </a:solidFill>
-                <a:latin typeface="Arial"/>
-              </a:rPr>
-              <a:t>4 sign-offs · 6 months to a roadmap · then ongoing</a:t>
-            </a:r>
-          </a:p>
-        </p:txBody>
-      </p:sp>
-    </p:spTree>
-    <p:extLst>
-      <p:ext uri="{BB962C8B-B14F-4D97-AF65-F5344CB8AC3E}">
-        <p14:creationId xmlns:p14="http://schemas.microsoft.com/office/powerpoint/2010/main" val="1196800265"/>
-      </p:ext>
-    </p:extLst>
-  </p:cSld>
-  <p:clrMapOvr>
-    <a:masterClrMapping/>
-  </p:clrMapOvr>
-</p:sld>
-</file>
-
 <file path=ppt/slides/slide10.xml><?xml version="1.0" encoding="utf-8"?>
 <p:sld xmlns:a="http://schemas.openxmlformats.org/drawingml/2006/main" xmlns:p="http://schemas.openxmlformats.org/presentationml/2006/main" xmlns:r="http://schemas.openxmlformats.org/officeDocument/2006/relationships">
   <p:cSld>
@@ -12520,58 +11632,14 @@
       <p:grpSpPr/>
       <p:sp>
         <p:nvSpPr>
-          <p:cNvPr id="2" name="Rectangle 1"/>
-          <p:cNvSpPr/>
-          <p:nvPr/>
-        </p:nvSpPr>
-        <p:spPr>
-          <a:xfrm>
-            <a:off x="457200" y="384048"/>
-            <a:ext cx="45720" cy="256032"/>
-          </a:xfrm>
-          <a:prstGeom prst="rect">
-            <a:avLst/>
-          </a:prstGeom>
-          <a:solidFill>
-            <a:srgbClr val="009CD6"/>
-          </a:solidFill>
-          <a:ln>
-            <a:noFill/>
-          </a:ln>
-          <a:effectLst/>
-        </p:spPr>
-        <p:style>
-          <a:lnRef idx="1">
-            <a:schemeClr val="accent1"/>
-          </a:lnRef>
-          <a:fillRef idx="3">
-            <a:schemeClr val="accent1"/>
-          </a:fillRef>
-          <a:effectRef idx="2">
-            <a:schemeClr val="accent1"/>
-          </a:effectRef>
-          <a:fontRef idx="minor">
-            <a:schemeClr val="lt1"/>
-          </a:fontRef>
-        </p:style>
-        <p:txBody>
-          <a:bodyPr rtlCol="0" anchor="ctr"/>
-          <a:lstStyle/>
-          <a:p>
-            <a:pPr algn="ctr"/>
-          </a:p>
-        </p:txBody>
-      </p:sp>
-      <p:sp>
-        <p:nvSpPr>
-          <p:cNvPr id="3" name="TextBox 2"/>
+          <p:cNvPr id="2" name="TextBox 1"/>
           <p:cNvSpPr txBox="1"/>
           <p:nvPr/>
         </p:nvSpPr>
         <p:spPr>
           <a:xfrm>
-            <a:off x="621792" y="274320"/>
-            <a:ext cx="11247120" cy="914400"/>
+            <a:off x="1005840" y="1325880"/>
+            <a:ext cx="5486400" cy="365760"/>
           </a:xfrm>
           <a:prstGeom prst="rect">
             <a:avLst/>
@@ -12585,13 +11653,47 @@
           <a:lstStyle/>
           <a:p>
             <a:r>
-              <a:rPr sz="2800" b="1" i="0">
+              <a:rPr sz="1200" b="1" i="0">
+                <a:solidFill>
+                  <a:srgbClr val="006E96"/>
+                </a:solidFill>
+                <a:latin typeface="Arial"/>
+              </a:rPr>
+              <a:t>WHERE WE START</a:t>
+            </a:r>
+          </a:p>
+        </p:txBody>
+      </p:sp>
+      <p:sp>
+        <p:nvSpPr>
+          <p:cNvPr id="3" name="TextBox 2"/>
+          <p:cNvSpPr txBox="1"/>
+          <p:nvPr/>
+        </p:nvSpPr>
+        <p:spPr>
+          <a:xfrm>
+            <a:off x="1005840" y="1783080"/>
+            <a:ext cx="10149840" cy="1737360"/>
+          </a:xfrm>
+          <a:prstGeom prst="rect">
+            <a:avLst/>
+          </a:prstGeom>
+          <a:noFill/>
+        </p:spPr>
+        <p:txBody>
+          <a:bodyPr wrap="square">
+            <a:spAutoFit/>
+          </a:bodyPr>
+          <a:lstStyle/>
+          <a:p>
+            <a:r>
+              <a:rPr sz="3000" b="1" i="0">
                 <a:solidFill>
                   <a:srgbClr val="1A1A1A"/>
                 </a:solidFill>
                 <a:latin typeface="Arial"/>
               </a:rPr>
-              <a:t>Minister, donor, vendor — all use the same picture</a:t>
+              <a:t>An Enterprise Architecture is a set of documents and diagrams.</a:t>
             </a:r>
           </a:p>
         </p:txBody>
@@ -12604,8 +11706,8 @@
         </p:nvSpPr>
         <p:spPr>
           <a:xfrm>
-            <a:off x="658368" y="1417320"/>
-            <a:ext cx="10984687" cy="1165860"/>
+            <a:off x="1005840" y="3611880"/>
+            <a:ext cx="10149840" cy="2377440"/>
           </a:xfrm>
           <a:prstGeom prst="rect">
             <a:avLst/>
@@ -12620,337 +11722,56 @@
           <a:p>
             <a:pPr>
               <a:spcAft>
-                <a:spcPts val="300"/>
+                <a:spcPts val="800"/>
               </a:spcAft>
             </a:pPr>
             <a:r>
-              <a:rPr sz="1900" b="1" i="0">
-                <a:solidFill>
-                  <a:srgbClr val="1A1A1A"/>
-                </a:solidFill>
-                <a:latin typeface="Arial"/>
-              </a:rPr>
-              <a:t>Your minister — to brief cabinet</a:t>
-            </a:r>
-          </a:p>
-          <a:p>
-            <a:pPr>
-              <a:spcAft>
-                <a:spcPts val="300"/>
-              </a:spcAft>
-            </a:pPr>
-            <a:r>
-              <a:rPr sz="1550" b="0" i="0">
+              <a:rPr sz="1700" b="0" i="0">
                 <a:solidFill>
                   <a:srgbClr val="595959"/>
                 </a:solidFill>
                 <a:latin typeface="Arial"/>
               </a:rPr>
-              <a:t>They cannot describe what the country’s digital spend is buying without an agreed picture of what the systems are.</a:t>
-            </a:r>
-          </a:p>
-        </p:txBody>
-      </p:sp>
-      <p:sp>
-        <p:nvSpPr>
-          <p:cNvPr id="5" name="Rectangle 4"/>
-          <p:cNvSpPr/>
-          <p:nvPr/>
-        </p:nvSpPr>
-        <p:spPr>
-          <a:xfrm>
-            <a:off x="621792" y="2587752"/>
-            <a:ext cx="10881360" cy="12700"/>
-          </a:xfrm>
-          <a:prstGeom prst="rect">
-            <a:avLst/>
-          </a:prstGeom>
-          <a:solidFill>
-            <a:srgbClr val="DDECF4"/>
-          </a:solidFill>
-          <a:ln>
-            <a:noFill/>
-          </a:ln>
-          <a:effectLst/>
-        </p:spPr>
-        <p:style>
-          <a:lnRef idx="1">
-            <a:schemeClr val="accent1"/>
-          </a:lnRef>
-          <a:fillRef idx="3">
-            <a:schemeClr val="accent1"/>
-          </a:fillRef>
-          <a:effectRef idx="2">
-            <a:schemeClr val="accent1"/>
-          </a:effectRef>
-          <a:fontRef idx="minor">
-            <a:schemeClr val="lt1"/>
-          </a:fontRef>
-        </p:style>
-        <p:txBody>
-          <a:bodyPr rtlCol="0" anchor="ctr"/>
-          <a:lstStyle/>
-          <a:p>
-            <a:pPr algn="ctr"/>
-          </a:p>
-        </p:txBody>
-      </p:sp>
-      <p:sp>
-        <p:nvSpPr>
-          <p:cNvPr id="6" name="TextBox 5"/>
-          <p:cNvSpPr txBox="1"/>
-          <p:nvPr/>
-        </p:nvSpPr>
-        <p:spPr>
-          <a:xfrm>
-            <a:off x="658368" y="2628900"/>
-            <a:ext cx="10984687" cy="1165860"/>
-          </a:xfrm>
-          <a:prstGeom prst="rect">
-            <a:avLst/>
-          </a:prstGeom>
-          <a:noFill/>
-        </p:spPr>
-        <p:txBody>
-          <a:bodyPr wrap="square">
-            <a:spAutoFit/>
-          </a:bodyPr>
-          <a:lstStyle/>
+              <a:t>What services your government delivers, and to whom.</a:t>
+            </a:r>
+          </a:p>
           <a:p>
             <a:pPr>
               <a:spcAft>
-                <a:spcPts val="300"/>
+                <a:spcPts val="800"/>
               </a:spcAft>
             </a:pPr>
             <a:r>
-              <a:rPr sz="1900" b="1" i="0">
-                <a:solidFill>
-                  <a:srgbClr val="1A1A1A"/>
-                </a:solidFill>
-                <a:latin typeface="Arial"/>
-              </a:rPr>
-              <a:t>The donor — before funding the next programme</a:t>
-            </a:r>
-          </a:p>
-          <a:p>
-            <a:pPr>
-              <a:spcAft>
-                <a:spcPts val="300"/>
-              </a:spcAft>
-            </a:pPr>
-            <a:r>
-              <a:rPr sz="1550" b="0" i="0">
+              <a:rPr sz="1700" b="0" i="0">
                 <a:solidFill>
                   <a:srgbClr val="595959"/>
                 </a:solidFill>
                 <a:latin typeface="Arial"/>
               </a:rPr>
-              <a:t>They want to see how their investment fits with the others.</a:t>
-            </a:r>
-          </a:p>
-        </p:txBody>
-      </p:sp>
-      <p:sp>
-        <p:nvSpPr>
-          <p:cNvPr id="7" name="Rectangle 6"/>
-          <p:cNvSpPr/>
-          <p:nvPr/>
-        </p:nvSpPr>
-        <p:spPr>
-          <a:xfrm>
-            <a:off x="621792" y="3799332"/>
-            <a:ext cx="10881360" cy="12700"/>
-          </a:xfrm>
-          <a:prstGeom prst="rect">
-            <a:avLst/>
-          </a:prstGeom>
-          <a:solidFill>
-            <a:srgbClr val="DDECF4"/>
-          </a:solidFill>
-          <a:ln>
-            <a:noFill/>
-          </a:ln>
-          <a:effectLst/>
-        </p:spPr>
-        <p:style>
-          <a:lnRef idx="1">
-            <a:schemeClr val="accent1"/>
-          </a:lnRef>
-          <a:fillRef idx="3">
-            <a:schemeClr val="accent1"/>
-          </a:fillRef>
-          <a:effectRef idx="2">
-            <a:schemeClr val="accent1"/>
-          </a:effectRef>
-          <a:fontRef idx="minor">
-            <a:schemeClr val="lt1"/>
-          </a:fontRef>
-        </p:style>
-        <p:txBody>
-          <a:bodyPr rtlCol="0" anchor="ctr"/>
-          <a:lstStyle/>
-          <a:p>
-            <a:pPr algn="ctr"/>
-          </a:p>
-        </p:txBody>
-      </p:sp>
-      <p:sp>
-        <p:nvSpPr>
-          <p:cNvPr id="8" name="TextBox 7"/>
-          <p:cNvSpPr txBox="1"/>
-          <p:nvPr/>
-        </p:nvSpPr>
-        <p:spPr>
-          <a:xfrm>
-            <a:off x="658368" y="3840480"/>
-            <a:ext cx="10984687" cy="1165860"/>
-          </a:xfrm>
-          <a:prstGeom prst="rect">
-            <a:avLst/>
-          </a:prstGeom>
-          <a:noFill/>
-        </p:spPr>
-        <p:txBody>
-          <a:bodyPr wrap="square">
-            <a:spAutoFit/>
-          </a:bodyPr>
-          <a:lstStyle/>
+              <a:t>What data it holds, and who owns it.</a:t>
+            </a:r>
+          </a:p>
           <a:p>
             <a:pPr>
               <a:spcAft>
-                <a:spcPts val="300"/>
+                <a:spcPts val="800"/>
               </a:spcAft>
             </a:pPr>
             <a:r>
-              <a:rPr sz="1900" b="1" i="0">
-                <a:solidFill>
-                  <a:srgbClr val="1A1A1A"/>
-                </a:solidFill>
-                <a:latin typeface="Arial"/>
-              </a:rPr>
-              <a:t>The vendor — to match what they propose</a:t>
-            </a:r>
-          </a:p>
-          <a:p>
-            <a:pPr>
-              <a:spcAft>
-                <a:spcPts val="300"/>
-              </a:spcAft>
-            </a:pPr>
-            <a:r>
-              <a:rPr sz="1550" b="0" i="0">
+              <a:rPr sz="1700" b="0" i="0">
                 <a:solidFill>
                   <a:srgbClr val="595959"/>
                 </a:solidFill>
                 <a:latin typeface="Arial"/>
               </a:rPr>
-              <a:t>What they build must fit what is already there.</a:t>
-            </a:r>
-          </a:p>
-        </p:txBody>
-      </p:sp>
-      <p:sp>
-        <p:nvSpPr>
-          <p:cNvPr id="9" name="Rectangle 8"/>
-          <p:cNvSpPr/>
-          <p:nvPr/>
-        </p:nvSpPr>
-        <p:spPr>
-          <a:xfrm>
-            <a:off x="621792" y="5010912"/>
-            <a:ext cx="10881360" cy="12700"/>
-          </a:xfrm>
-          <a:prstGeom prst="rect">
-            <a:avLst/>
-          </a:prstGeom>
-          <a:solidFill>
-            <a:srgbClr val="DDECF4"/>
-          </a:solidFill>
-          <a:ln>
-            <a:noFill/>
-          </a:ln>
-          <a:effectLst/>
-        </p:spPr>
-        <p:style>
-          <a:lnRef idx="1">
-            <a:schemeClr val="accent1"/>
-          </a:lnRef>
-          <a:fillRef idx="3">
-            <a:schemeClr val="accent1"/>
-          </a:fillRef>
-          <a:effectRef idx="2">
-            <a:schemeClr val="accent1"/>
-          </a:effectRef>
-          <a:fontRef idx="minor">
-            <a:schemeClr val="lt1"/>
-          </a:fontRef>
-        </p:style>
-        <p:txBody>
-          <a:bodyPr rtlCol="0" anchor="ctr"/>
-          <a:lstStyle/>
-          <a:p>
-            <a:pPr algn="ctr"/>
-          </a:p>
-        </p:txBody>
-      </p:sp>
-      <p:sp>
-        <p:nvSpPr>
-          <p:cNvPr id="10" name="TextBox 9"/>
-          <p:cNvSpPr txBox="1"/>
-          <p:nvPr/>
-        </p:nvSpPr>
-        <p:spPr>
-          <a:xfrm>
-            <a:off x="658368" y="5052059"/>
-            <a:ext cx="10984687" cy="1165860"/>
-          </a:xfrm>
-          <a:prstGeom prst="rect">
-            <a:avLst/>
-          </a:prstGeom>
-          <a:noFill/>
-        </p:spPr>
-        <p:txBody>
-          <a:bodyPr wrap="square">
-            <a:spAutoFit/>
-          </a:bodyPr>
-          <a:lstStyle/>
-          <a:p>
-            <a:pPr>
-              <a:spcAft>
-                <a:spcPts val="300"/>
-              </a:spcAft>
-            </a:pPr>
-            <a:r>
-              <a:rPr sz="1900" b="1" i="0">
-                <a:solidFill>
-                  <a:srgbClr val="1A1A1A"/>
-                </a:solidFill>
-                <a:latin typeface="Arial"/>
-              </a:rPr>
-              <a:t>You — to keep all three aligned</a:t>
-            </a:r>
-          </a:p>
-          <a:p>
-            <a:pPr>
-              <a:spcAft>
-                <a:spcPts val="300"/>
-              </a:spcAft>
-            </a:pPr>
-            <a:r>
-              <a:rPr sz="1550" b="0" i="0">
-                <a:solidFill>
-                  <a:srgbClr val="595959"/>
-                </a:solidFill>
-                <a:latin typeface="Arial"/>
-              </a:rPr>
-              <a:t>So the donor funds what the country needs, the vendor builds what fits, and the minister tells a coherent story.</a:t>
-            </a:r>
-          </a:p>
-        </p:txBody>
-      </p:sp>
-      <p:sp>
-        <p:nvSpPr>
-          <p:cNvPr id="11" name="TextBox 10"/>
+              <a:t>What software supports those services. What infrastructure runs underneath.</a:t>
+            </a:r>
+          </a:p>
+        </p:txBody>
+      </p:sp>
+      <p:sp>
+        <p:nvSpPr>
+          <p:cNvPr id="5" name="TextBox 4"/>
           <p:cNvSpPr txBox="1"/>
           <p:nvPr/>
         </p:nvSpPr>
@@ -12978,6 +11799,41 @@
                 <a:latin typeface="Arial"/>
               </a:rPr>
               <a:t>1.2 · What an EA actually is</a:t>
+            </a:r>
+          </a:p>
+        </p:txBody>
+      </p:sp>
+      <p:sp>
+        <p:nvSpPr>
+          <p:cNvPr id="6" name="TextBox 5"/>
+          <p:cNvSpPr txBox="1"/>
+          <p:nvPr/>
+        </p:nvSpPr>
+        <p:spPr>
+          <a:xfrm>
+            <a:off x="10058400" y="6473952"/>
+            <a:ext cx="1673352" cy="292608"/>
+          </a:xfrm>
+          <a:prstGeom prst="rect">
+            <a:avLst/>
+          </a:prstGeom>
+          <a:noFill/>
+        </p:spPr>
+        <p:txBody>
+          <a:bodyPr wrap="square">
+            <a:spAutoFit/>
+          </a:bodyPr>
+          <a:lstStyle/>
+          <a:p>
+            <a:pPr algn="r"/>
+            <a:r>
+              <a:rPr sz="900" b="0" i="0">
+                <a:solidFill>
+                  <a:srgbClr val="595959"/>
+                </a:solidFill>
+                <a:latin typeface="Arial"/>
+              </a:rPr>
+              <a:t>www.itu.int</a:t>
             </a:r>
           </a:p>
         </p:txBody>
@@ -13073,7 +11929,7 @@
                 </a:solidFill>
                 <a:latin typeface="Arial"/>
               </a:rPr>
-              <a:t>The picture has four parts</a:t>
+              <a:t>An EA is the agreed picture — not software you buy</a:t>
             </a:r>
           </a:p>
         </p:txBody>
@@ -13086,8 +11942,8 @@
         </p:nvSpPr>
         <p:spPr>
           <a:xfrm>
-            <a:off x="658368" y="1463040"/>
-            <a:ext cx="8778240" cy="1115568"/>
+            <a:off x="658368" y="1600200"/>
+            <a:ext cx="5394960" cy="4297680"/>
           </a:xfrm>
           <a:prstGeom prst="roundRect">
             <a:avLst>
@@ -13132,8 +11988,8 @@
         </p:nvSpPr>
         <p:spPr>
           <a:xfrm>
-            <a:off x="886968" y="1609344"/>
-            <a:ext cx="8321040" cy="841247"/>
+            <a:off x="859536" y="1746504"/>
+            <a:ext cx="4992624" cy="4023360"/>
           </a:xfrm>
           <a:prstGeom prst="rect">
             <a:avLst/>
@@ -13152,22 +12008,61 @@
               </a:spcAft>
             </a:pPr>
             <a:r>
-              <a:rPr sz="1800" b="1" i="0">
+              <a:rPr sz="2000" b="1" i="0">
+                <a:solidFill>
+                  <a:srgbClr val="006E96"/>
+                </a:solidFill>
+                <a:latin typeface="Arial"/>
+              </a:rPr>
+              <a:t>An EA is</a:t>
+            </a:r>
+          </a:p>
+          <a:p>
+            <a:pPr>
+              <a:spcAft>
+                <a:spcPts val="700"/>
+              </a:spcAft>
+            </a:pPr>
+            <a:r>
+              <a:rPr sz="1700" b="0" i="0">
                 <a:solidFill>
                   <a:srgbClr val="1A1A1A"/>
                 </a:solidFill>
                 <a:latin typeface="Arial"/>
               </a:rPr>
-              <a:t>Services</a:t>
-            </a:r>
-            <a:r>
-              <a:rPr sz="1400" b="0" i="0">
+              <a:t>the agreed picture of your government</a:t>
+            </a:r>
+          </a:p>
+          <a:p>
+            <a:pPr>
+              <a:spcAft>
+                <a:spcPts val="700"/>
+              </a:spcAft>
+            </a:pPr>
+            <a:r>
+              <a:rPr sz="1700" b="0" i="0">
                 <a:solidFill>
-                  <a:srgbClr val="595959"/>
+                  <a:srgbClr val="1A1A1A"/>
                 </a:solidFill>
                 <a:latin typeface="Arial"/>
               </a:rPr>
-              <a:t>   What your government does, and for whom. The layer your minister talks about — the layer the public sees.</a:t>
+              <a:t>a set of documents and diagrams</a:t>
+            </a:r>
+          </a:p>
+          <a:p>
+            <a:pPr>
+              <a:spcAft>
+                <a:spcPts val="700"/>
+              </a:spcAft>
+            </a:pPr>
+            <a:r>
+              <a:rPr sz="1700" b="0" i="0">
+                <a:solidFill>
+                  <a:srgbClr val="1A1A1A"/>
+                </a:solidFill>
+                <a:latin typeface="Arial"/>
+              </a:rPr>
+              <a:t>the same description everyone uses — minister, CIO, donor, vendor</a:t>
             </a:r>
           </a:p>
         </p:txBody>
@@ -13180,8 +12075,8 @@
         </p:nvSpPr>
         <p:spPr>
           <a:xfrm>
-            <a:off x="658368" y="2651760"/>
-            <a:ext cx="8778240" cy="1115568"/>
+            <a:off x="6281928" y="1600200"/>
+            <a:ext cx="5394960" cy="4297680"/>
           </a:xfrm>
           <a:prstGeom prst="roundRect">
             <a:avLst>
@@ -13189,7 +12084,7 @@
             </a:avLst>
           </a:prstGeom>
           <a:solidFill>
-            <a:srgbClr val="009CD6"/>
+            <a:srgbClr val="F2F2F2"/>
           </a:solidFill>
           <a:ln>
             <a:noFill/>
@@ -13226,8 +12121,8 @@
         </p:nvSpPr>
         <p:spPr>
           <a:xfrm>
-            <a:off x="886968" y="2798064"/>
-            <a:ext cx="8321040" cy="841247"/>
+            <a:off x="6483096" y="1746504"/>
+            <a:ext cx="4992624" cy="4023360"/>
           </a:xfrm>
           <a:prstGeom prst="rect">
             <a:avLst/>
@@ -13246,93 +12141,15 @@
               </a:spcAft>
             </a:pPr>
             <a:r>
-              <a:rPr sz="1800" b="1" i="0">
+              <a:rPr sz="2000" b="1" i="0">
                 <a:solidFill>
-                  <a:srgbClr val="FFFFFF"/>
+                  <a:srgbClr val="595959"/>
                 </a:solidFill>
                 <a:latin typeface="Arial"/>
               </a:rPr>
-              <a:t>Data</a:t>
-            </a:r>
-            <a:r>
-              <a:rPr sz="1400" b="0" i="0">
-                <a:solidFill>
-                  <a:srgbClr val="FFFFFF"/>
-                </a:solidFill>
-                <a:latin typeface="Arial"/>
-              </a:rPr>
-              <a:t>   The information your government holds, who owns it, where the authoritative copy lives.</a:t>
-            </a:r>
-          </a:p>
-        </p:txBody>
-      </p:sp>
-      <p:sp>
-        <p:nvSpPr>
-          <p:cNvPr id="8" name="Rounded Rectangle 7"/>
-          <p:cNvSpPr/>
-          <p:nvPr/>
-        </p:nvSpPr>
-        <p:spPr>
-          <a:xfrm>
-            <a:off x="658368" y="3840480"/>
-            <a:ext cx="8778240" cy="1115568"/>
-          </a:xfrm>
-          <a:prstGeom prst="roundRect">
-            <a:avLst>
-              <a:gd name="adj" fmla="val 4500"/>
-            </a:avLst>
-          </a:prstGeom>
-          <a:solidFill>
-            <a:srgbClr val="E5F5FB"/>
-          </a:solidFill>
-          <a:ln>
-            <a:noFill/>
-          </a:ln>
-          <a:effectLst/>
-        </p:spPr>
-        <p:style>
-          <a:lnRef idx="1">
-            <a:schemeClr val="accent1"/>
-          </a:lnRef>
-          <a:fillRef idx="3">
-            <a:schemeClr val="accent1"/>
-          </a:fillRef>
-          <a:effectRef idx="2">
-            <a:schemeClr val="accent1"/>
-          </a:effectRef>
-          <a:fontRef idx="minor">
-            <a:schemeClr val="lt1"/>
-          </a:fontRef>
-        </p:style>
-        <p:txBody>
-          <a:bodyPr rtlCol="0" anchor="ctr"/>
-          <a:lstStyle/>
-          <a:p>
-            <a:pPr algn="ctr"/>
-          </a:p>
-        </p:txBody>
-      </p:sp>
-      <p:sp>
-        <p:nvSpPr>
-          <p:cNvPr id="9" name="TextBox 8"/>
-          <p:cNvSpPr txBox="1"/>
-          <p:nvPr/>
-        </p:nvSpPr>
-        <p:spPr>
-          <a:xfrm>
-            <a:off x="886968" y="3986784"/>
-            <a:ext cx="8321040" cy="841247"/>
-          </a:xfrm>
-          <a:prstGeom prst="rect">
-            <a:avLst/>
-          </a:prstGeom>
-          <a:noFill/>
-        </p:spPr>
-        <p:txBody>
-          <a:bodyPr wrap="square">
-            <a:spAutoFit/>
-          </a:bodyPr>
-          <a:lstStyle/>
+              <a:t>An EA is not</a:t>
+            </a:r>
+          </a:p>
           <a:p>
             <a:pPr>
               <a:spcAft>
@@ -13340,93 +12157,15 @@
               </a:spcAft>
             </a:pPr>
             <a:r>
-              <a:rPr sz="1800" b="1" i="0">
+              <a:rPr sz="1700" b="0" i="0">
                 <a:solidFill>
                   <a:srgbClr val="1A1A1A"/>
                 </a:solidFill>
                 <a:latin typeface="Arial"/>
               </a:rPr>
-              <a:t>Applications</a:t>
-            </a:r>
-            <a:r>
-              <a:rPr sz="1400" b="0" i="0">
-                <a:solidFill>
-                  <a:srgbClr val="595959"/>
-                </a:solidFill>
-                <a:latin typeface="Arial"/>
-              </a:rPr>
-              <a:t>   The software that uses the data to deliver the services. What gets bought, built, integrated, replaced.</a:t>
-            </a:r>
-          </a:p>
-        </p:txBody>
-      </p:sp>
-      <p:sp>
-        <p:nvSpPr>
-          <p:cNvPr id="10" name="Rounded Rectangle 9"/>
-          <p:cNvSpPr/>
-          <p:nvPr/>
-        </p:nvSpPr>
-        <p:spPr>
-          <a:xfrm>
-            <a:off x="658368" y="5029200"/>
-            <a:ext cx="8778240" cy="1115568"/>
-          </a:xfrm>
-          <a:prstGeom prst="roundRect">
-            <a:avLst>
-              <a:gd name="adj" fmla="val 4500"/>
-            </a:avLst>
-          </a:prstGeom>
-          <a:solidFill>
-            <a:srgbClr val="E5F5FB"/>
-          </a:solidFill>
-          <a:ln>
-            <a:noFill/>
-          </a:ln>
-          <a:effectLst/>
-        </p:spPr>
-        <p:style>
-          <a:lnRef idx="1">
-            <a:schemeClr val="accent1"/>
-          </a:lnRef>
-          <a:fillRef idx="3">
-            <a:schemeClr val="accent1"/>
-          </a:fillRef>
-          <a:effectRef idx="2">
-            <a:schemeClr val="accent1"/>
-          </a:effectRef>
-          <a:fontRef idx="minor">
-            <a:schemeClr val="lt1"/>
-          </a:fontRef>
-        </p:style>
-        <p:txBody>
-          <a:bodyPr rtlCol="0" anchor="ctr"/>
-          <a:lstStyle/>
-          <a:p>
-            <a:pPr algn="ctr"/>
-          </a:p>
-        </p:txBody>
-      </p:sp>
-      <p:sp>
-        <p:nvSpPr>
-          <p:cNvPr id="11" name="TextBox 10"/>
-          <p:cNvSpPr txBox="1"/>
-          <p:nvPr/>
-        </p:nvSpPr>
-        <p:spPr>
-          <a:xfrm>
-            <a:off x="886968" y="5175504"/>
-            <a:ext cx="8321040" cy="841247"/>
-          </a:xfrm>
-          <a:prstGeom prst="rect">
-            <a:avLst/>
-          </a:prstGeom>
-          <a:noFill/>
-        </p:spPr>
-        <p:txBody>
-          <a:bodyPr wrap="square">
-            <a:spAutoFit/>
-          </a:bodyPr>
-          <a:lstStyle/>
+              <a:t>software</a:t>
+            </a:r>
+          </a:p>
           <a:p>
             <a:pPr>
               <a:spcAft>
@@ -13434,84 +12173,36 @@
               </a:spcAft>
             </a:pPr>
             <a:r>
-              <a:rPr sz="1800" b="1" i="0">
+              <a:rPr sz="1700" b="0" i="0">
                 <a:solidFill>
                   <a:srgbClr val="1A1A1A"/>
                 </a:solidFill>
                 <a:latin typeface="Arial"/>
               </a:rPr>
-              <a:t>Technology</a:t>
-            </a:r>
-            <a:r>
-              <a:rPr sz="1400" b="0" i="0">
+              <a:t>a vendor product</a:t>
+            </a:r>
+          </a:p>
+          <a:p>
+            <a:pPr>
+              <a:spcAft>
+                <a:spcPts val="700"/>
+              </a:spcAft>
+            </a:pPr>
+            <a:r>
+              <a:rPr sz="1700" b="0" i="0">
                 <a:solidFill>
-                  <a:srgbClr val="595959"/>
+                  <a:srgbClr val="1A1A1A"/>
                 </a:solidFill>
                 <a:latin typeface="Arial"/>
               </a:rPr>
-              <a:t>   The infrastructure underneath — networks, hosting, identity, security.</a:t>
-            </a:r>
-          </a:p>
-        </p:txBody>
-      </p:sp>
-      <p:sp>
-        <p:nvSpPr>
-          <p:cNvPr id="12" name="TextBox 11"/>
-          <p:cNvSpPr txBox="1"/>
-          <p:nvPr/>
-        </p:nvSpPr>
-        <p:spPr>
-          <a:xfrm>
-            <a:off x="9646920" y="2331720"/>
-            <a:ext cx="2103120" cy="2011680"/>
-          </a:xfrm>
-          <a:prstGeom prst="rect">
-            <a:avLst/>
-          </a:prstGeom>
-          <a:noFill/>
-        </p:spPr>
-        <p:txBody>
-          <a:bodyPr wrap="square">
-            <a:spAutoFit/>
-          </a:bodyPr>
-          <a:lstStyle/>
-          <a:p>
-            <a:pPr>
-              <a:spcAft>
-                <a:spcPts val="800"/>
-              </a:spcAft>
-            </a:pPr>
-            <a:r>
-              <a:rPr sz="1300" b="0" i="1">
-                <a:solidFill>
-                  <a:srgbClr val="595959"/>
-                </a:solidFill>
-                <a:latin typeface="Arial"/>
-              </a:rPr>
-              <a:t>Applications come and go. Technology cycles every decade.</a:t>
-            </a:r>
-          </a:p>
-          <a:p>
-            <a:pPr>
-              <a:spcAft>
-                <a:spcPts val="800"/>
-              </a:spcAft>
-            </a:pPr>
-            <a:r>
-              <a:rPr sz="1500" b="1" i="0">
-                <a:solidFill>
-                  <a:srgbClr val="006E96"/>
-                </a:solidFill>
-                <a:latin typeface="Arial"/>
-              </a:rPr>
-              <a:t>Data outlasts them all.</a:t>
-            </a:r>
-          </a:p>
-        </p:txBody>
-      </p:sp>
-      <p:sp>
-        <p:nvSpPr>
-          <p:cNvPr id="13" name="TextBox 12"/>
+              <a:t>a tool you procure</a:t>
+            </a:r>
+          </a:p>
+        </p:txBody>
+      </p:sp>
+      <p:sp>
+        <p:nvSpPr>
+          <p:cNvPr id="8" name="TextBox 7"/>
           <p:cNvSpPr txBox="1"/>
           <p:nvPr/>
         </p:nvSpPr>
@@ -13634,7 +12325,7 @@
                 </a:solidFill>
                 <a:latin typeface="Arial"/>
               </a:rPr>
-              <a:t>Written down, a list of projects becomes a system</a:t>
+              <a:t>Minister, donor, vendor — all use the same picture</a:t>
             </a:r>
           </a:p>
         </p:txBody>
@@ -13647,8 +12338,8 @@
         </p:nvSpPr>
         <p:spPr>
           <a:xfrm>
-            <a:off x="658368" y="1737360"/>
-            <a:ext cx="10789920" cy="4114800"/>
+            <a:off x="658368" y="1417320"/>
+            <a:ext cx="10984687" cy="1165860"/>
           </a:xfrm>
           <a:prstGeom prst="rect">
             <a:avLst/>
@@ -13663,72 +12354,337 @@
           <a:p>
             <a:pPr>
               <a:spcAft>
-                <a:spcPts val="1400"/>
+                <a:spcPts val="300"/>
               </a:spcAft>
             </a:pPr>
             <a:r>
-              <a:rPr sz="2200" b="0" i="0">
+              <a:rPr sz="1900" b="1" i="0">
                 <a:solidFill>
                   <a:srgbClr val="1A1A1A"/>
                 </a:solidFill>
                 <a:latin typeface="Arial"/>
               </a:rPr>
-              <a:t>When you write down all four parts, your digital landscape stops being a list of unrelated projects. It starts looking like a system —</a:t>
+              <a:t>Your minister — to brief cabinet</a:t>
             </a:r>
           </a:p>
           <a:p>
             <a:pPr>
               <a:spcAft>
-                <a:spcPts val="1400"/>
+                <a:spcPts val="300"/>
               </a:spcAft>
             </a:pPr>
             <a:r>
-              <a:rPr sz="2200" b="0" i="0">
+              <a:rPr sz="1550" b="0" i="0">
+                <a:solidFill>
+                  <a:srgbClr val="595959"/>
+                </a:solidFill>
+                <a:latin typeface="Arial"/>
+              </a:rPr>
+              <a:t>They cannot describe what the country’s digital spend is buying without an agreed picture of what the systems are.</a:t>
+            </a:r>
+          </a:p>
+        </p:txBody>
+      </p:sp>
+      <p:sp>
+        <p:nvSpPr>
+          <p:cNvPr id="5" name="Rectangle 4"/>
+          <p:cNvSpPr/>
+          <p:nvPr/>
+        </p:nvSpPr>
+        <p:spPr>
+          <a:xfrm>
+            <a:off x="621792" y="2587752"/>
+            <a:ext cx="10881360" cy="12700"/>
+          </a:xfrm>
+          <a:prstGeom prst="rect">
+            <a:avLst/>
+          </a:prstGeom>
+          <a:solidFill>
+            <a:srgbClr val="DDECF4"/>
+          </a:solidFill>
+          <a:ln>
+            <a:noFill/>
+          </a:ln>
+          <a:effectLst/>
+        </p:spPr>
+        <p:style>
+          <a:lnRef idx="1">
+            <a:schemeClr val="accent1"/>
+          </a:lnRef>
+          <a:fillRef idx="3">
+            <a:schemeClr val="accent1"/>
+          </a:fillRef>
+          <a:effectRef idx="2">
+            <a:schemeClr val="accent1"/>
+          </a:effectRef>
+          <a:fontRef idx="minor">
+            <a:schemeClr val="lt1"/>
+          </a:fontRef>
+        </p:style>
+        <p:txBody>
+          <a:bodyPr rtlCol="0" anchor="ctr"/>
+          <a:lstStyle/>
+          <a:p>
+            <a:pPr algn="ctr"/>
+          </a:p>
+        </p:txBody>
+      </p:sp>
+      <p:sp>
+        <p:nvSpPr>
+          <p:cNvPr id="6" name="TextBox 5"/>
+          <p:cNvSpPr txBox="1"/>
+          <p:nvPr/>
+        </p:nvSpPr>
+        <p:spPr>
+          <a:xfrm>
+            <a:off x="658368" y="2628900"/>
+            <a:ext cx="10984687" cy="1165860"/>
+          </a:xfrm>
+          <a:prstGeom prst="rect">
+            <a:avLst/>
+          </a:prstGeom>
+          <a:noFill/>
+        </p:spPr>
+        <p:txBody>
+          <a:bodyPr wrap="square">
+            <a:spAutoFit/>
+          </a:bodyPr>
+          <a:lstStyle/>
+          <a:p>
+            <a:pPr>
+              <a:spcAft>
+                <a:spcPts val="300"/>
+              </a:spcAft>
+            </a:pPr>
+            <a:r>
+              <a:rPr sz="1900" b="1" i="0">
                 <a:solidFill>
                   <a:srgbClr val="1A1A1A"/>
                 </a:solidFill>
                 <a:latin typeface="Arial"/>
               </a:rPr>
-              <a:t>a system you can change deliberately,</a:t>
+              <a:t>The donor — before funding the next programme</a:t>
             </a:r>
           </a:p>
           <a:p>
             <a:pPr>
               <a:spcAft>
-                <a:spcPts val="1400"/>
+                <a:spcPts val="300"/>
               </a:spcAft>
             </a:pPr>
             <a:r>
-              <a:rPr sz="2200" b="0" i="0">
+              <a:rPr sz="1550" b="0" i="0">
+                <a:solidFill>
+                  <a:srgbClr val="595959"/>
+                </a:solidFill>
+                <a:latin typeface="Arial"/>
+              </a:rPr>
+              <a:t>They want to see how their investment fits with the others.</a:t>
+            </a:r>
+          </a:p>
+        </p:txBody>
+      </p:sp>
+      <p:sp>
+        <p:nvSpPr>
+          <p:cNvPr id="7" name="Rectangle 6"/>
+          <p:cNvSpPr/>
+          <p:nvPr/>
+        </p:nvSpPr>
+        <p:spPr>
+          <a:xfrm>
+            <a:off x="621792" y="3799332"/>
+            <a:ext cx="10881360" cy="12700"/>
+          </a:xfrm>
+          <a:prstGeom prst="rect">
+            <a:avLst/>
+          </a:prstGeom>
+          <a:solidFill>
+            <a:srgbClr val="DDECF4"/>
+          </a:solidFill>
+          <a:ln>
+            <a:noFill/>
+          </a:ln>
+          <a:effectLst/>
+        </p:spPr>
+        <p:style>
+          <a:lnRef idx="1">
+            <a:schemeClr val="accent1"/>
+          </a:lnRef>
+          <a:fillRef idx="3">
+            <a:schemeClr val="accent1"/>
+          </a:fillRef>
+          <a:effectRef idx="2">
+            <a:schemeClr val="accent1"/>
+          </a:effectRef>
+          <a:fontRef idx="minor">
+            <a:schemeClr val="lt1"/>
+          </a:fontRef>
+        </p:style>
+        <p:txBody>
+          <a:bodyPr rtlCol="0" anchor="ctr"/>
+          <a:lstStyle/>
+          <a:p>
+            <a:pPr algn="ctr"/>
+          </a:p>
+        </p:txBody>
+      </p:sp>
+      <p:sp>
+        <p:nvSpPr>
+          <p:cNvPr id="8" name="TextBox 7"/>
+          <p:cNvSpPr txBox="1"/>
+          <p:nvPr/>
+        </p:nvSpPr>
+        <p:spPr>
+          <a:xfrm>
+            <a:off x="658368" y="3840480"/>
+            <a:ext cx="10984687" cy="1165860"/>
+          </a:xfrm>
+          <a:prstGeom prst="rect">
+            <a:avLst/>
+          </a:prstGeom>
+          <a:noFill/>
+        </p:spPr>
+        <p:txBody>
+          <a:bodyPr wrap="square">
+            <a:spAutoFit/>
+          </a:bodyPr>
+          <a:lstStyle/>
+          <a:p>
+            <a:pPr>
+              <a:spcAft>
+                <a:spcPts val="300"/>
+              </a:spcAft>
+            </a:pPr>
+            <a:r>
+              <a:rPr sz="1900" b="1" i="0">
                 <a:solidFill>
                   <a:srgbClr val="1A1A1A"/>
                 </a:solidFill>
                 <a:latin typeface="Arial"/>
               </a:rPr>
-              <a:t>a system you can plan investments against,</a:t>
+              <a:t>The vendor — to match what they propose</a:t>
             </a:r>
           </a:p>
           <a:p>
             <a:pPr>
               <a:spcAft>
-                <a:spcPts val="1400"/>
+                <a:spcPts val="300"/>
               </a:spcAft>
             </a:pPr>
             <a:r>
-              <a:rPr sz="2200" b="0" i="0">
+              <a:rPr sz="1550" b="0" i="0">
+                <a:solidFill>
+                  <a:srgbClr val="595959"/>
+                </a:solidFill>
+                <a:latin typeface="Arial"/>
+              </a:rPr>
+              <a:t>What they build must fit what is already there.</a:t>
+            </a:r>
+          </a:p>
+        </p:txBody>
+      </p:sp>
+      <p:sp>
+        <p:nvSpPr>
+          <p:cNvPr id="9" name="Rectangle 8"/>
+          <p:cNvSpPr/>
+          <p:nvPr/>
+        </p:nvSpPr>
+        <p:spPr>
+          <a:xfrm>
+            <a:off x="621792" y="5010912"/>
+            <a:ext cx="10881360" cy="12700"/>
+          </a:xfrm>
+          <a:prstGeom prst="rect">
+            <a:avLst/>
+          </a:prstGeom>
+          <a:solidFill>
+            <a:srgbClr val="DDECF4"/>
+          </a:solidFill>
+          <a:ln>
+            <a:noFill/>
+          </a:ln>
+          <a:effectLst/>
+        </p:spPr>
+        <p:style>
+          <a:lnRef idx="1">
+            <a:schemeClr val="accent1"/>
+          </a:lnRef>
+          <a:fillRef idx="3">
+            <a:schemeClr val="accent1"/>
+          </a:fillRef>
+          <a:effectRef idx="2">
+            <a:schemeClr val="accent1"/>
+          </a:effectRef>
+          <a:fontRef idx="minor">
+            <a:schemeClr val="lt1"/>
+          </a:fontRef>
+        </p:style>
+        <p:txBody>
+          <a:bodyPr rtlCol="0" anchor="ctr"/>
+          <a:lstStyle/>
+          <a:p>
+            <a:pPr algn="ctr"/>
+          </a:p>
+        </p:txBody>
+      </p:sp>
+      <p:sp>
+        <p:nvSpPr>
+          <p:cNvPr id="10" name="TextBox 9"/>
+          <p:cNvSpPr txBox="1"/>
+          <p:nvPr/>
+        </p:nvSpPr>
+        <p:spPr>
+          <a:xfrm>
+            <a:off x="658368" y="5052059"/>
+            <a:ext cx="10984687" cy="1165860"/>
+          </a:xfrm>
+          <a:prstGeom prst="rect">
+            <a:avLst/>
+          </a:prstGeom>
+          <a:noFill/>
+        </p:spPr>
+        <p:txBody>
+          <a:bodyPr wrap="square">
+            <a:spAutoFit/>
+          </a:bodyPr>
+          <a:lstStyle/>
+          <a:p>
+            <a:pPr>
+              <a:spcAft>
+                <a:spcPts val="300"/>
+              </a:spcAft>
+            </a:pPr>
+            <a:r>
+              <a:rPr sz="1900" b="1" i="0">
                 <a:solidFill>
                   <a:srgbClr val="1A1A1A"/>
                 </a:solidFill>
                 <a:latin typeface="Arial"/>
               </a:rPr>
-              <a:t>a system you can talk about across ministries, with donors and vendors, without re-explaining the basics every time.</a:t>
-            </a:r>
-          </a:p>
-        </p:txBody>
-      </p:sp>
-      <p:sp>
-        <p:nvSpPr>
-          <p:cNvPr id="5" name="TextBox 4"/>
+              <a:t>You — to keep all three aligned</a:t>
+            </a:r>
+          </a:p>
+          <a:p>
+            <a:pPr>
+              <a:spcAft>
+                <a:spcPts val="300"/>
+              </a:spcAft>
+            </a:pPr>
+            <a:r>
+              <a:rPr sz="1550" b="0" i="0">
+                <a:solidFill>
+                  <a:srgbClr val="595959"/>
+                </a:solidFill>
+                <a:latin typeface="Arial"/>
+              </a:rPr>
+              <a:t>So the donor funds what the country needs, the vendor builds what fits, and the minister tells a coherent story.</a:t>
+            </a:r>
+          </a:p>
+        </p:txBody>
+      </p:sp>
+      <p:sp>
+        <p:nvSpPr>
+          <p:cNvPr id="11" name="TextBox 10"/>
           <p:cNvSpPr txBox="1"/>
           <p:nvPr/>
         </p:nvSpPr>
@@ -13780,95 +12736,23 @@
       <p:grpSpPr/>
       <p:sp>
         <p:nvSpPr>
-          <p:cNvPr id="2" name="TextBox 1"/>
-          <p:cNvSpPr txBox="1"/>
+          <p:cNvPr id="2" name="Rectangle 1"/>
+          <p:cNvSpPr/>
           <p:nvPr/>
         </p:nvSpPr>
         <p:spPr>
           <a:xfrm>
-            <a:off x="1005840" y="2103120"/>
-            <a:ext cx="10149840" cy="2377440"/>
+            <a:off x="457200" y="384048"/>
+            <a:ext cx="45720" cy="256032"/>
           </a:xfrm>
           <a:prstGeom prst="rect">
             <a:avLst/>
           </a:prstGeom>
-          <a:noFill/>
-        </p:spPr>
-        <p:txBody>
-          <a:bodyPr wrap="square">
-            <a:spAutoFit/>
-          </a:bodyPr>
-          <a:lstStyle/>
-          <a:p>
-            <a:r>
-              <a:rPr sz="3000" b="1" i="0">
-                <a:solidFill>
-                  <a:srgbClr val="1A1A1A"/>
-                </a:solidFill>
-                <a:latin typeface="Arial"/>
-              </a:rPr>
-              <a:t>An EA is the agreed picture of your government — and the tool that lets you lead the conversation about what comes next.</a:t>
-            </a:r>
-          </a:p>
-        </p:txBody>
-      </p:sp>
-      <p:sp>
-        <p:nvSpPr>
-          <p:cNvPr id="3" name="TextBox 2"/>
-          <p:cNvSpPr txBox="1"/>
-          <p:nvPr/>
-        </p:nvSpPr>
-        <p:spPr>
-          <a:xfrm>
-            <a:off x="1005840" y="1554480"/>
-            <a:ext cx="5486400" cy="365760"/>
-          </a:xfrm>
-          <a:prstGeom prst="rect">
-            <a:avLst/>
-          </a:prstGeom>
-          <a:noFill/>
-        </p:spPr>
-        <p:txBody>
-          <a:bodyPr wrap="square">
-            <a:spAutoFit/>
-          </a:bodyPr>
-          <a:lstStyle/>
-          <a:p>
-            <a:r>
-              <a:rPr sz="1200" b="1" i="0">
-                <a:solidFill>
-                  <a:srgbClr val="006E96"/>
-                </a:solidFill>
-                <a:latin typeface="Arial"/>
-              </a:rPr>
-              <a:t>IN ONE SENTENCE</a:t>
-            </a:r>
-          </a:p>
-        </p:txBody>
-      </p:sp>
-      <p:sp>
-        <p:nvSpPr>
-          <p:cNvPr id="4" name="Rounded Rectangle 3"/>
-          <p:cNvSpPr/>
-          <p:nvPr/>
-        </p:nvSpPr>
-        <p:spPr>
-          <a:xfrm>
-            <a:off x="658368" y="4709160"/>
-            <a:ext cx="10881360" cy="1554480"/>
-          </a:xfrm>
-          <a:prstGeom prst="roundRect">
-            <a:avLst>
-              <a:gd name="adj" fmla="val 4500"/>
-            </a:avLst>
-          </a:prstGeom>
           <a:solidFill>
-            <a:srgbClr val="FFFFFF"/>
+            <a:srgbClr val="009CD6"/>
           </a:solidFill>
-          <a:ln w="9525">
-            <a:solidFill>
-              <a:srgbClr val="009CD6"/>
-            </a:solidFill>
+          <a:ln>
+            <a:noFill/>
           </a:ln>
           <a:effectLst/>
         </p:spPr>
@@ -13887,25 +12771,120 @@
           </a:fontRef>
         </p:style>
         <p:txBody>
-          <a:bodyPr rtlCol="0" anchor="ctr" wrap="square" lIns="228600" rIns="228600" tIns="109728" bIns="109728">
-            <a:noAutofit/>
+          <a:bodyPr rtlCol="0" anchor="ctr"/>
+          <a:lstStyle/>
+          <a:p>
+            <a:pPr algn="ctr"/>
+          </a:p>
+        </p:txBody>
+      </p:sp>
+      <p:sp>
+        <p:nvSpPr>
+          <p:cNvPr id="3" name="TextBox 2"/>
+          <p:cNvSpPr txBox="1"/>
+          <p:nvPr/>
+        </p:nvSpPr>
+        <p:spPr>
+          <a:xfrm>
+            <a:off x="621792" y="274320"/>
+            <a:ext cx="11247120" cy="914400"/>
+          </a:xfrm>
+          <a:prstGeom prst="rect">
+            <a:avLst/>
+          </a:prstGeom>
+          <a:noFill/>
+        </p:spPr>
+        <p:txBody>
+          <a:bodyPr wrap="square">
+            <a:spAutoFit/>
           </a:bodyPr>
           <a:lstStyle/>
           <a:p>
-            <a:pPr algn="l">
-              <a:spcAft>
-                <a:spcPts val="400"/>
-              </a:spcAft>
-            </a:pPr>
-            <a:r>
-              <a:rPr sz="1800" b="1" i="0">
+            <a:r>
+              <a:rPr sz="2800" b="1" i="0">
                 <a:solidFill>
-                  <a:srgbClr val="006E96"/>
+                  <a:srgbClr val="1A1A1A"/>
                 </a:solidFill>
                 <a:latin typeface="Arial"/>
               </a:rPr>
-              <a:t>Do this on your own sector. </a:t>
-            </a:r>
+              <a:t>The picture has four parts</a:t>
+            </a:r>
+          </a:p>
+        </p:txBody>
+      </p:sp>
+      <p:sp>
+        <p:nvSpPr>
+          <p:cNvPr id="4" name="Rounded Rectangle 3"/>
+          <p:cNvSpPr/>
+          <p:nvPr/>
+        </p:nvSpPr>
+        <p:spPr>
+          <a:xfrm>
+            <a:off x="658368" y="1463040"/>
+            <a:ext cx="8778240" cy="1115568"/>
+          </a:xfrm>
+          <a:prstGeom prst="roundRect">
+            <a:avLst>
+              <a:gd name="adj" fmla="val 4500"/>
+            </a:avLst>
+          </a:prstGeom>
+          <a:solidFill>
+            <a:srgbClr val="E5F5FB"/>
+          </a:solidFill>
+          <a:ln>
+            <a:noFill/>
+          </a:ln>
+          <a:effectLst/>
+        </p:spPr>
+        <p:style>
+          <a:lnRef idx="1">
+            <a:schemeClr val="accent1"/>
+          </a:lnRef>
+          <a:fillRef idx="3">
+            <a:schemeClr val="accent1"/>
+          </a:fillRef>
+          <a:effectRef idx="2">
+            <a:schemeClr val="accent1"/>
+          </a:effectRef>
+          <a:fontRef idx="minor">
+            <a:schemeClr val="lt1"/>
+          </a:fontRef>
+        </p:style>
+        <p:txBody>
+          <a:bodyPr rtlCol="0" anchor="ctr"/>
+          <a:lstStyle/>
+          <a:p>
+            <a:pPr algn="ctr"/>
+          </a:p>
+        </p:txBody>
+      </p:sp>
+      <p:sp>
+        <p:nvSpPr>
+          <p:cNvPr id="5" name="TextBox 4"/>
+          <p:cNvSpPr txBox="1"/>
+          <p:nvPr/>
+        </p:nvSpPr>
+        <p:spPr>
+          <a:xfrm>
+            <a:off x="886968" y="1609344"/>
+            <a:ext cx="8321040" cy="841247"/>
+          </a:xfrm>
+          <a:prstGeom prst="rect">
+            <a:avLst/>
+          </a:prstGeom>
+          <a:noFill/>
+        </p:spPr>
+        <p:txBody>
+          <a:bodyPr wrap="square">
+            <a:spAutoFit/>
+          </a:bodyPr>
+          <a:lstStyle/>
+          <a:p>
+            <a:pPr>
+              <a:spcAft>
+                <a:spcPts val="700"/>
+              </a:spcAft>
+            </a:pPr>
             <a:r>
               <a:rPr sz="1800" b="1" i="0">
                 <a:solidFill>
@@ -13913,30 +12892,360 @@
                 </a:solidFill>
                 <a:latin typeface="Arial"/>
               </a:rPr>
-              <a:t>Draft a one-slide 'what is EA' explainer for ministers.</a:t>
-            </a:r>
-          </a:p>
-          <a:p>
-            <a:pPr algn="l">
-              <a:spcAft>
-                <a:spcPts val="400"/>
-              </a:spcAft>
-            </a:pPr>
-            <a:r>
-              <a:rPr sz="1800" b="0" i="0">
+              <a:t>Services</a:t>
+            </a:r>
+            <a:r>
+              <a:rPr sz="1400" b="0" i="0">
                 <a:solidFill>
                   <a:srgbClr val="595959"/>
                 </a:solidFill>
                 <a:latin typeface="Arial"/>
               </a:rPr>
-              <a:t>The prompt in the companion material gives you a one-slide structure ready to paste into the country's slide template. Before the next video.</a:t>
-            </a:r>
-          </a:p>
-        </p:txBody>
-      </p:sp>
-      <p:sp>
-        <p:nvSpPr>
-          <p:cNvPr id="5" name="TextBox 4"/>
+              <a:t>   What your government does, and for whom. The layer your minister talks about — the layer the public sees.</a:t>
+            </a:r>
+          </a:p>
+        </p:txBody>
+      </p:sp>
+      <p:sp>
+        <p:nvSpPr>
+          <p:cNvPr id="6" name="Rounded Rectangle 5"/>
+          <p:cNvSpPr/>
+          <p:nvPr/>
+        </p:nvSpPr>
+        <p:spPr>
+          <a:xfrm>
+            <a:off x="658368" y="2651760"/>
+            <a:ext cx="8778240" cy="1115568"/>
+          </a:xfrm>
+          <a:prstGeom prst="roundRect">
+            <a:avLst>
+              <a:gd name="adj" fmla="val 4500"/>
+            </a:avLst>
+          </a:prstGeom>
+          <a:solidFill>
+            <a:srgbClr val="009CD6"/>
+          </a:solidFill>
+          <a:ln>
+            <a:noFill/>
+          </a:ln>
+          <a:effectLst/>
+        </p:spPr>
+        <p:style>
+          <a:lnRef idx="1">
+            <a:schemeClr val="accent1"/>
+          </a:lnRef>
+          <a:fillRef idx="3">
+            <a:schemeClr val="accent1"/>
+          </a:fillRef>
+          <a:effectRef idx="2">
+            <a:schemeClr val="accent1"/>
+          </a:effectRef>
+          <a:fontRef idx="minor">
+            <a:schemeClr val="lt1"/>
+          </a:fontRef>
+        </p:style>
+        <p:txBody>
+          <a:bodyPr rtlCol="0" anchor="ctr"/>
+          <a:lstStyle/>
+          <a:p>
+            <a:pPr algn="ctr"/>
+          </a:p>
+        </p:txBody>
+      </p:sp>
+      <p:sp>
+        <p:nvSpPr>
+          <p:cNvPr id="7" name="TextBox 6"/>
+          <p:cNvSpPr txBox="1"/>
+          <p:nvPr/>
+        </p:nvSpPr>
+        <p:spPr>
+          <a:xfrm>
+            <a:off x="886968" y="2798064"/>
+            <a:ext cx="8321040" cy="841247"/>
+          </a:xfrm>
+          <a:prstGeom prst="rect">
+            <a:avLst/>
+          </a:prstGeom>
+          <a:noFill/>
+        </p:spPr>
+        <p:txBody>
+          <a:bodyPr wrap="square">
+            <a:spAutoFit/>
+          </a:bodyPr>
+          <a:lstStyle/>
+          <a:p>
+            <a:pPr>
+              <a:spcAft>
+                <a:spcPts val="700"/>
+              </a:spcAft>
+            </a:pPr>
+            <a:r>
+              <a:rPr sz="1800" b="1" i="0">
+                <a:solidFill>
+                  <a:srgbClr val="FFFFFF"/>
+                </a:solidFill>
+                <a:latin typeface="Arial"/>
+              </a:rPr>
+              <a:t>Data</a:t>
+            </a:r>
+            <a:r>
+              <a:rPr sz="1400" b="0" i="0">
+                <a:solidFill>
+                  <a:srgbClr val="FFFFFF"/>
+                </a:solidFill>
+                <a:latin typeface="Arial"/>
+              </a:rPr>
+              <a:t>   The information your government holds, who owns it, where the authoritative copy lives.</a:t>
+            </a:r>
+          </a:p>
+        </p:txBody>
+      </p:sp>
+      <p:sp>
+        <p:nvSpPr>
+          <p:cNvPr id="8" name="Rounded Rectangle 7"/>
+          <p:cNvSpPr/>
+          <p:nvPr/>
+        </p:nvSpPr>
+        <p:spPr>
+          <a:xfrm>
+            <a:off x="658368" y="3840480"/>
+            <a:ext cx="8778240" cy="1115568"/>
+          </a:xfrm>
+          <a:prstGeom prst="roundRect">
+            <a:avLst>
+              <a:gd name="adj" fmla="val 4500"/>
+            </a:avLst>
+          </a:prstGeom>
+          <a:solidFill>
+            <a:srgbClr val="E5F5FB"/>
+          </a:solidFill>
+          <a:ln>
+            <a:noFill/>
+          </a:ln>
+          <a:effectLst/>
+        </p:spPr>
+        <p:style>
+          <a:lnRef idx="1">
+            <a:schemeClr val="accent1"/>
+          </a:lnRef>
+          <a:fillRef idx="3">
+            <a:schemeClr val="accent1"/>
+          </a:fillRef>
+          <a:effectRef idx="2">
+            <a:schemeClr val="accent1"/>
+          </a:effectRef>
+          <a:fontRef idx="minor">
+            <a:schemeClr val="lt1"/>
+          </a:fontRef>
+        </p:style>
+        <p:txBody>
+          <a:bodyPr rtlCol="0" anchor="ctr"/>
+          <a:lstStyle/>
+          <a:p>
+            <a:pPr algn="ctr"/>
+          </a:p>
+        </p:txBody>
+      </p:sp>
+      <p:sp>
+        <p:nvSpPr>
+          <p:cNvPr id="9" name="TextBox 8"/>
+          <p:cNvSpPr txBox="1"/>
+          <p:nvPr/>
+        </p:nvSpPr>
+        <p:spPr>
+          <a:xfrm>
+            <a:off x="886968" y="3986784"/>
+            <a:ext cx="8321040" cy="841247"/>
+          </a:xfrm>
+          <a:prstGeom prst="rect">
+            <a:avLst/>
+          </a:prstGeom>
+          <a:noFill/>
+        </p:spPr>
+        <p:txBody>
+          <a:bodyPr wrap="square">
+            <a:spAutoFit/>
+          </a:bodyPr>
+          <a:lstStyle/>
+          <a:p>
+            <a:pPr>
+              <a:spcAft>
+                <a:spcPts val="700"/>
+              </a:spcAft>
+            </a:pPr>
+            <a:r>
+              <a:rPr sz="1800" b="1" i="0">
+                <a:solidFill>
+                  <a:srgbClr val="1A1A1A"/>
+                </a:solidFill>
+                <a:latin typeface="Arial"/>
+              </a:rPr>
+              <a:t>Applications</a:t>
+            </a:r>
+            <a:r>
+              <a:rPr sz="1400" b="0" i="0">
+                <a:solidFill>
+                  <a:srgbClr val="595959"/>
+                </a:solidFill>
+                <a:latin typeface="Arial"/>
+              </a:rPr>
+              <a:t>   The software that uses the data to deliver the services. What gets bought, built, integrated, replaced.</a:t>
+            </a:r>
+          </a:p>
+        </p:txBody>
+      </p:sp>
+      <p:sp>
+        <p:nvSpPr>
+          <p:cNvPr id="10" name="Rounded Rectangle 9"/>
+          <p:cNvSpPr/>
+          <p:nvPr/>
+        </p:nvSpPr>
+        <p:spPr>
+          <a:xfrm>
+            <a:off x="658368" y="5029200"/>
+            <a:ext cx="8778240" cy="1115568"/>
+          </a:xfrm>
+          <a:prstGeom prst="roundRect">
+            <a:avLst>
+              <a:gd name="adj" fmla="val 4500"/>
+            </a:avLst>
+          </a:prstGeom>
+          <a:solidFill>
+            <a:srgbClr val="E5F5FB"/>
+          </a:solidFill>
+          <a:ln>
+            <a:noFill/>
+          </a:ln>
+          <a:effectLst/>
+        </p:spPr>
+        <p:style>
+          <a:lnRef idx="1">
+            <a:schemeClr val="accent1"/>
+          </a:lnRef>
+          <a:fillRef idx="3">
+            <a:schemeClr val="accent1"/>
+          </a:fillRef>
+          <a:effectRef idx="2">
+            <a:schemeClr val="accent1"/>
+          </a:effectRef>
+          <a:fontRef idx="minor">
+            <a:schemeClr val="lt1"/>
+          </a:fontRef>
+        </p:style>
+        <p:txBody>
+          <a:bodyPr rtlCol="0" anchor="ctr"/>
+          <a:lstStyle/>
+          <a:p>
+            <a:pPr algn="ctr"/>
+          </a:p>
+        </p:txBody>
+      </p:sp>
+      <p:sp>
+        <p:nvSpPr>
+          <p:cNvPr id="11" name="TextBox 10"/>
+          <p:cNvSpPr txBox="1"/>
+          <p:nvPr/>
+        </p:nvSpPr>
+        <p:spPr>
+          <a:xfrm>
+            <a:off x="886968" y="5175504"/>
+            <a:ext cx="8321040" cy="841247"/>
+          </a:xfrm>
+          <a:prstGeom prst="rect">
+            <a:avLst/>
+          </a:prstGeom>
+          <a:noFill/>
+        </p:spPr>
+        <p:txBody>
+          <a:bodyPr wrap="square">
+            <a:spAutoFit/>
+          </a:bodyPr>
+          <a:lstStyle/>
+          <a:p>
+            <a:pPr>
+              <a:spcAft>
+                <a:spcPts val="700"/>
+              </a:spcAft>
+            </a:pPr>
+            <a:r>
+              <a:rPr sz="1800" b="1" i="0">
+                <a:solidFill>
+                  <a:srgbClr val="1A1A1A"/>
+                </a:solidFill>
+                <a:latin typeface="Arial"/>
+              </a:rPr>
+              <a:t>Technology</a:t>
+            </a:r>
+            <a:r>
+              <a:rPr sz="1400" b="0" i="0">
+                <a:solidFill>
+                  <a:srgbClr val="595959"/>
+                </a:solidFill>
+                <a:latin typeface="Arial"/>
+              </a:rPr>
+              <a:t>   The infrastructure underneath — networks, hosting, identity, security.</a:t>
+            </a:r>
+          </a:p>
+        </p:txBody>
+      </p:sp>
+      <p:sp>
+        <p:nvSpPr>
+          <p:cNvPr id="12" name="TextBox 11"/>
+          <p:cNvSpPr txBox="1"/>
+          <p:nvPr/>
+        </p:nvSpPr>
+        <p:spPr>
+          <a:xfrm>
+            <a:off x="9646920" y="2331720"/>
+            <a:ext cx="2103120" cy="2011680"/>
+          </a:xfrm>
+          <a:prstGeom prst="rect">
+            <a:avLst/>
+          </a:prstGeom>
+          <a:noFill/>
+        </p:spPr>
+        <p:txBody>
+          <a:bodyPr wrap="square">
+            <a:spAutoFit/>
+          </a:bodyPr>
+          <a:lstStyle/>
+          <a:p>
+            <a:pPr>
+              <a:spcAft>
+                <a:spcPts val="800"/>
+              </a:spcAft>
+            </a:pPr>
+            <a:r>
+              <a:rPr sz="1300" b="0" i="1">
+                <a:solidFill>
+                  <a:srgbClr val="595959"/>
+                </a:solidFill>
+                <a:latin typeface="Arial"/>
+              </a:rPr>
+              <a:t>Applications come and go. Technology cycles every decade.</a:t>
+            </a:r>
+          </a:p>
+          <a:p>
+            <a:pPr>
+              <a:spcAft>
+                <a:spcPts val="800"/>
+              </a:spcAft>
+            </a:pPr>
+            <a:r>
+              <a:rPr sz="1500" b="1" i="0">
+                <a:solidFill>
+                  <a:srgbClr val="006E96"/>
+                </a:solidFill>
+                <a:latin typeface="Arial"/>
+              </a:rPr>
+              <a:t>Data outlasts them all.</a:t>
+            </a:r>
+          </a:p>
+        </p:txBody>
+      </p:sp>
+      <p:sp>
+        <p:nvSpPr>
+          <p:cNvPr id="13" name="TextBox 12"/>
           <p:cNvSpPr txBox="1"/>
           <p:nvPr/>
         </p:nvSpPr>
@@ -13964,41 +13273,6 @@
                 <a:latin typeface="Arial"/>
               </a:rPr>
               <a:t>1.2 · What an EA actually is</a:t>
-            </a:r>
-          </a:p>
-        </p:txBody>
-      </p:sp>
-      <p:sp>
-        <p:nvSpPr>
-          <p:cNvPr id="6" name="TextBox 5"/>
-          <p:cNvSpPr txBox="1"/>
-          <p:nvPr/>
-        </p:nvSpPr>
-        <p:spPr>
-          <a:xfrm>
-            <a:off x="10058400" y="6473952"/>
-            <a:ext cx="1673352" cy="292608"/>
-          </a:xfrm>
-          <a:prstGeom prst="rect">
-            <a:avLst/>
-          </a:prstGeom>
-          <a:noFill/>
-        </p:spPr>
-        <p:txBody>
-          <a:bodyPr wrap="square">
-            <a:spAutoFit/>
-          </a:bodyPr>
-          <a:lstStyle/>
-          <a:p>
-            <a:pPr algn="r"/>
-            <a:r>
-              <a:rPr sz="900" b="0" i="0">
-                <a:solidFill>
-                  <a:srgbClr val="595959"/>
-                </a:solidFill>
-                <a:latin typeface="Arial"/>
-              </a:rPr>
-              <a:t>www.itu.int</a:t>
             </a:r>
           </a:p>
         </p:txBody>
@@ -14094,7 +13368,7 @@
                 </a:solidFill>
                 <a:latin typeface="Arial"/>
               </a:rPr>
-              <a:t>Sources</a:t>
+              <a:t>Written down, a list of projects becomes a system</a:t>
             </a:r>
           </a:p>
         </p:txBody>
@@ -14107,8 +13381,8 @@
         </p:nvSpPr>
         <p:spPr>
           <a:xfrm>
-            <a:off x="658368" y="1554480"/>
-            <a:ext cx="10789920" cy="3840480"/>
+            <a:off x="658368" y="1737360"/>
+            <a:ext cx="10789920" cy="4114800"/>
           </a:xfrm>
           <a:prstGeom prst="rect">
             <a:avLst/>
@@ -14123,74 +13397,72 @@
           <a:p>
             <a:pPr>
               <a:spcAft>
-                <a:spcPts val="1200"/>
+                <a:spcPts val="1400"/>
               </a:spcAft>
             </a:pPr>
             <a:r>
-              <a:rPr sz="1700" b="0" i="0">
+              <a:rPr sz="2200" b="0" i="0">
                 <a:solidFill>
                   <a:srgbClr val="1A1A1A"/>
                 </a:solidFill>
                 <a:latin typeface="Arial"/>
               </a:rPr>
-              <a:t>•  PAERA v1.0 — §2.3 Role of Enterprise Architecture</a:t>
+              <a:t>When you write down all four parts, your digital landscape stops being a list of unrelated projects. It starts looking like a system —</a:t>
             </a:r>
           </a:p>
           <a:p>
             <a:pPr>
               <a:spcAft>
-                <a:spcPts val="1200"/>
+                <a:spcPts val="1400"/>
               </a:spcAft>
             </a:pPr>
             <a:r>
-              <a:rPr sz="1700" b="0" i="0">
+              <a:rPr sz="2200" b="0" i="0">
                 <a:solidFill>
                   <a:srgbClr val="1A1A1A"/>
                 </a:solidFill>
                 <a:latin typeface="Arial"/>
               </a:rPr>
-              <a:t>•  TOGAF — BDAT layering reference</a:t>
-            </a:r>
-          </a:p>
-        </p:txBody>
-      </p:sp>
-      <p:sp>
-        <p:nvSpPr>
-          <p:cNvPr id="5" name="TextBox 4"/>
-          <p:cNvSpPr txBox="1"/>
-          <p:nvPr/>
-        </p:nvSpPr>
-        <p:spPr>
-          <a:xfrm>
-            <a:off x="658368" y="5806440"/>
-            <a:ext cx="10789920" cy="457200"/>
-          </a:xfrm>
-          <a:prstGeom prst="rect">
-            <a:avLst/>
-          </a:prstGeom>
-          <a:noFill/>
-        </p:spPr>
-        <p:txBody>
-          <a:bodyPr wrap="square">
-            <a:spAutoFit/>
-          </a:bodyPr>
-          <a:lstStyle/>
-          <a:p>
-            <a:r>
-              <a:rPr sz="1400" b="1" i="0">
+              <a:t>a system you can change deliberately,</a:t>
+            </a:r>
+          </a:p>
+          <a:p>
+            <a:pPr>
+              <a:spcAft>
+                <a:spcPts val="1400"/>
+              </a:spcAft>
+            </a:pPr>
+            <a:r>
+              <a:rPr sz="2200" b="0" i="0">
                 <a:solidFill>
-                  <a:srgbClr val="006E96"/>
+                  <a:srgbClr val="1A1A1A"/>
                 </a:solidFill>
                 <a:latin typeface="Arial"/>
               </a:rPr>
-              <a:t>Find the link in the description.</a:t>
-            </a:r>
-          </a:p>
-        </p:txBody>
-      </p:sp>
-      <p:sp>
-        <p:nvSpPr>
-          <p:cNvPr id="6" name="TextBox 5"/>
+              <a:t>a system you can plan investments against,</a:t>
+            </a:r>
+          </a:p>
+          <a:p>
+            <a:pPr>
+              <a:spcAft>
+                <a:spcPts val="1400"/>
+              </a:spcAft>
+            </a:pPr>
+            <a:r>
+              <a:rPr sz="2200" b="0" i="0">
+                <a:solidFill>
+                  <a:srgbClr val="1A1A1A"/>
+                </a:solidFill>
+                <a:latin typeface="Arial"/>
+              </a:rPr>
+              <a:t>a system you can talk about across ministries, with donors and vendors, without re-explaining the basics every time.</a:t>
+            </a:r>
+          </a:p>
+        </p:txBody>
+      </p:sp>
+      <p:sp>
+        <p:nvSpPr>
+          <p:cNvPr id="5" name="TextBox 4"/>
           <p:cNvSpPr txBox="1"/>
           <p:nvPr/>
         </p:nvSpPr>
@@ -14230,7 +13502,7 @@
 </p:sld>
 </file>
 
-<file path=ppt/slides/slide8.xml><?xml version="1.0" encoding="utf-8"?>
+<file path=ppt/slides/slide15.xml><?xml version="1.0" encoding="utf-8"?>
 <p:sld xmlns:a="http://schemas.openxmlformats.org/drawingml/2006/main" xmlns:p="http://schemas.openxmlformats.org/presentationml/2006/main" xmlns:r="http://schemas.openxmlformats.org/officeDocument/2006/relationships">
   <p:cSld>
     <p:spTree>
@@ -14248,8 +13520,8 @@
         </p:nvSpPr>
         <p:spPr>
           <a:xfrm>
-            <a:off x="822960" y="822960"/>
-            <a:ext cx="7315200" cy="457200"/>
+            <a:off x="1005840" y="2103120"/>
+            <a:ext cx="10149840" cy="2377440"/>
           </a:xfrm>
           <a:prstGeom prst="rect">
             <a:avLst/>
@@ -14263,27 +13535,149 @@
           <a:lstStyle/>
           <a:p>
             <a:r>
+              <a:rPr sz="3000" b="1" i="0">
+                <a:solidFill>
+                  <a:srgbClr val="1A1A1A"/>
+                </a:solidFill>
+                <a:latin typeface="Arial"/>
+              </a:rPr>
+              <a:t>An EA is the agreed picture of your government — and the tool that lets you lead the conversation about what comes next.</a:t>
+            </a:r>
+          </a:p>
+        </p:txBody>
+      </p:sp>
+      <p:sp>
+        <p:nvSpPr>
+          <p:cNvPr id="3" name="TextBox 2"/>
+          <p:cNvSpPr txBox="1"/>
+          <p:nvPr/>
+        </p:nvSpPr>
+        <p:spPr>
+          <a:xfrm>
+            <a:off x="1005840" y="1554480"/>
+            <a:ext cx="5486400" cy="365760"/>
+          </a:xfrm>
+          <a:prstGeom prst="rect">
+            <a:avLst/>
+          </a:prstGeom>
+          <a:noFill/>
+        </p:spPr>
+        <p:txBody>
+          <a:bodyPr wrap="square">
+            <a:spAutoFit/>
+          </a:bodyPr>
+          <a:lstStyle/>
+          <a:p>
+            <a:r>
               <a:rPr sz="1200" b="1" i="0">
+                <a:solidFill>
+                  <a:srgbClr val="006E96"/>
+                </a:solidFill>
+                <a:latin typeface="Arial"/>
+              </a:rPr>
+              <a:t>IN ONE SENTENCE</a:t>
+            </a:r>
+          </a:p>
+        </p:txBody>
+      </p:sp>
+      <p:sp>
+        <p:nvSpPr>
+          <p:cNvPr id="4" name="Rounded Rectangle 3"/>
+          <p:cNvSpPr/>
+          <p:nvPr/>
+        </p:nvSpPr>
+        <p:spPr>
+          <a:xfrm>
+            <a:off x="658368" y="4709160"/>
+            <a:ext cx="10881360" cy="1554480"/>
+          </a:xfrm>
+          <a:prstGeom prst="roundRect">
+            <a:avLst>
+              <a:gd name="adj" fmla="val 4500"/>
+            </a:avLst>
+          </a:prstGeom>
+          <a:solidFill>
+            <a:srgbClr val="FFFFFF"/>
+          </a:solidFill>
+          <a:ln w="9525">
+            <a:solidFill>
+              <a:srgbClr val="009CD6"/>
+            </a:solidFill>
+          </a:ln>
+          <a:effectLst/>
+        </p:spPr>
+        <p:style>
+          <a:lnRef idx="1">
+            <a:schemeClr val="accent1"/>
+          </a:lnRef>
+          <a:fillRef idx="3">
+            <a:schemeClr val="accent1"/>
+          </a:fillRef>
+          <a:effectRef idx="2">
+            <a:schemeClr val="accent1"/>
+          </a:effectRef>
+          <a:fontRef idx="minor">
+            <a:schemeClr val="lt1"/>
+          </a:fontRef>
+        </p:style>
+        <p:txBody>
+          <a:bodyPr rtlCol="0" anchor="ctr" wrap="square" lIns="228600" rIns="228600" tIns="109728" bIns="109728">
+            <a:noAutofit/>
+          </a:bodyPr>
+          <a:lstStyle/>
+          <a:p>
+            <a:pPr algn="l">
+              <a:spcAft>
+                <a:spcPts val="400"/>
+              </a:spcAft>
+            </a:pPr>
+            <a:r>
+              <a:rPr sz="1800" b="1" i="0">
+                <a:solidFill>
+                  <a:srgbClr val="006E96"/>
+                </a:solidFill>
+                <a:latin typeface="Arial"/>
+              </a:rPr>
+              <a:t>Do this on your own sector. </a:t>
+            </a:r>
+            <a:r>
+              <a:rPr sz="1800" b="1" i="0">
+                <a:solidFill>
+                  <a:srgbClr val="1A1A1A"/>
+                </a:solidFill>
+                <a:latin typeface="Arial"/>
+              </a:rPr>
+              <a:t>Draft a one-slide 'what is EA' explainer for ministers.</a:t>
+            </a:r>
+          </a:p>
+          <a:p>
+            <a:pPr algn="l">
+              <a:spcAft>
+                <a:spcPts val="400"/>
+              </a:spcAft>
+            </a:pPr>
+            <a:r>
+              <a:rPr sz="1800" b="0" i="0">
                 <a:solidFill>
                   <a:srgbClr val="595959"/>
                 </a:solidFill>
                 <a:latin typeface="Arial"/>
               </a:rPr>
-              <a:t>KP1 · MODULE 1 · VIDEO 1.2</a:t>
-            </a:r>
-          </a:p>
-        </p:txBody>
-      </p:sp>
-      <p:sp>
-        <p:nvSpPr>
-          <p:cNvPr id="3" name="TextBox 2"/>
+              <a:t>The prompt in the companion material gives you a one-slide structure ready to paste into the country's slide template. Before the next video.</a:t>
+            </a:r>
+          </a:p>
+        </p:txBody>
+      </p:sp>
+      <p:sp>
+        <p:nvSpPr>
+          <p:cNvPr id="5" name="TextBox 4"/>
           <p:cNvSpPr txBox="1"/>
           <p:nvPr/>
         </p:nvSpPr>
         <p:spPr>
           <a:xfrm>
-            <a:off x="822960" y="1828800"/>
-            <a:ext cx="2011680" cy="1097280"/>
+            <a:off x="457200" y="6473952"/>
+            <a:ext cx="7772400" cy="292608"/>
           </a:xfrm>
           <a:prstGeom prst="rect">
             <a:avLst/>
@@ -14297,27 +13691,27 @@
           <a:lstStyle/>
           <a:p>
             <a:r>
-              <a:rPr sz="6000" b="1" i="0">
+              <a:rPr sz="900" b="0" i="0">
                 <a:solidFill>
-                  <a:srgbClr val="009CD6"/>
+                  <a:srgbClr val="595959"/>
                 </a:solidFill>
                 <a:latin typeface="Arial"/>
               </a:rPr>
-              <a:t>1.2</a:t>
-            </a:r>
-          </a:p>
-        </p:txBody>
-      </p:sp>
-      <p:sp>
-        <p:nvSpPr>
-          <p:cNvPr id="4" name="TextBox 3"/>
+              <a:t>1.2 · What an EA actually is</a:t>
+            </a:r>
+          </a:p>
+        </p:txBody>
+      </p:sp>
+      <p:sp>
+        <p:nvSpPr>
+          <p:cNvPr id="6" name="TextBox 5"/>
           <p:cNvSpPr txBox="1"/>
           <p:nvPr/>
         </p:nvSpPr>
         <p:spPr>
           <a:xfrm>
-            <a:off x="822960" y="2880360"/>
-            <a:ext cx="9601200" cy="1371600"/>
+            <a:off x="10058400" y="6473952"/>
+            <a:ext cx="1673352" cy="292608"/>
           </a:xfrm>
           <a:prstGeom prst="rect">
             <a:avLst/>
@@ -14330,28 +13724,125 @@
           </a:bodyPr>
           <a:lstStyle/>
           <a:p>
-            <a:r>
-              <a:rPr sz="3400" b="1" i="0">
+            <a:pPr algn="r"/>
+            <a:r>
+              <a:rPr sz="900" b="0" i="0">
+                <a:solidFill>
+                  <a:srgbClr val="595959"/>
+                </a:solidFill>
+                <a:latin typeface="Arial"/>
+              </a:rPr>
+              <a:t>www.itu.int</a:t>
+            </a:r>
+          </a:p>
+        </p:txBody>
+      </p:sp>
+    </p:spTree>
+  </p:cSld>
+  <p:clrMapOvr>
+    <a:masterClrMapping/>
+  </p:clrMapOvr>
+</p:sld>
+</file>
+
+<file path=ppt/slides/slide16.xml><?xml version="1.0" encoding="utf-8"?>
+<p:sld xmlns:a="http://schemas.openxmlformats.org/drawingml/2006/main" xmlns:p="http://schemas.openxmlformats.org/presentationml/2006/main" xmlns:r="http://schemas.openxmlformats.org/officeDocument/2006/relationships">
+  <p:cSld>
+    <p:spTree>
+      <p:nvGrpSpPr>
+        <p:cNvPr id="1" name=""/>
+        <p:cNvGrpSpPr/>
+        <p:nvPr/>
+      </p:nvGrpSpPr>
+      <p:grpSpPr/>
+      <p:sp>
+        <p:nvSpPr>
+          <p:cNvPr id="2" name="Rectangle 1"/>
+          <p:cNvSpPr/>
+          <p:nvPr/>
+        </p:nvSpPr>
+        <p:spPr>
+          <a:xfrm>
+            <a:off x="457200" y="384048"/>
+            <a:ext cx="45720" cy="256032"/>
+          </a:xfrm>
+          <a:prstGeom prst="rect">
+            <a:avLst/>
+          </a:prstGeom>
+          <a:solidFill>
+            <a:srgbClr val="009CD6"/>
+          </a:solidFill>
+          <a:ln>
+            <a:noFill/>
+          </a:ln>
+          <a:effectLst/>
+        </p:spPr>
+        <p:style>
+          <a:lnRef idx="1">
+            <a:schemeClr val="accent1"/>
+          </a:lnRef>
+          <a:fillRef idx="3">
+            <a:schemeClr val="accent1"/>
+          </a:fillRef>
+          <a:effectRef idx="2">
+            <a:schemeClr val="accent1"/>
+          </a:effectRef>
+          <a:fontRef idx="minor">
+            <a:schemeClr val="lt1"/>
+          </a:fontRef>
+        </p:style>
+        <p:txBody>
+          <a:bodyPr rtlCol="0" anchor="ctr"/>
+          <a:lstStyle/>
+          <a:p>
+            <a:pPr algn="ctr"/>
+          </a:p>
+        </p:txBody>
+      </p:sp>
+      <p:sp>
+        <p:nvSpPr>
+          <p:cNvPr id="3" name="TextBox 2"/>
+          <p:cNvSpPr txBox="1"/>
+          <p:nvPr/>
+        </p:nvSpPr>
+        <p:spPr>
+          <a:xfrm>
+            <a:off x="621792" y="274320"/>
+            <a:ext cx="11247120" cy="914400"/>
+          </a:xfrm>
+          <a:prstGeom prst="rect">
+            <a:avLst/>
+          </a:prstGeom>
+          <a:noFill/>
+        </p:spPr>
+        <p:txBody>
+          <a:bodyPr wrap="square">
+            <a:spAutoFit/>
+          </a:bodyPr>
+          <a:lstStyle/>
+          <a:p>
+            <a:r>
+              <a:rPr sz="2800" b="1" i="0">
                 <a:solidFill>
                   <a:srgbClr val="1A1A1A"/>
                 </a:solidFill>
                 <a:latin typeface="Arial"/>
               </a:rPr>
-              <a:t>What an EA actually is</a:t>
-            </a:r>
-          </a:p>
-        </p:txBody>
-      </p:sp>
-      <p:sp>
-        <p:nvSpPr>
-          <p:cNvPr id="5" name="TextBox 4"/>
+              <a:t>Sources</a:t>
+            </a:r>
+          </a:p>
+        </p:txBody>
+      </p:sp>
+      <p:sp>
+        <p:nvSpPr>
+          <p:cNvPr id="4" name="TextBox 3"/>
           <p:cNvSpPr txBox="1"/>
           <p:nvPr/>
         </p:nvSpPr>
         <p:spPr>
           <a:xfrm>
-            <a:off x="822960" y="4343400"/>
-            <a:ext cx="9875520" cy="1554480"/>
+            <a:off x="658368" y="1554480"/>
+            <a:ext cx="10789920" cy="3840480"/>
           </a:xfrm>
           <a:prstGeom prst="rect">
             <a:avLst/>
@@ -14364,48 +13855,103 @@
           </a:bodyPr>
           <a:lstStyle/>
           <a:p>
-            <a:r>
-              <a:rPr sz="1700" b="0" i="1">
+            <a:pPr>
+              <a:spcAft>
+                <a:spcPts val="1200"/>
+              </a:spcAft>
+            </a:pPr>
+            <a:r>
+              <a:rPr sz="1700" b="0" i="0">
+                <a:solidFill>
+                  <a:srgbClr val="1A1A1A"/>
+                </a:solidFill>
+                <a:latin typeface="Arial"/>
+              </a:rPr>
+              <a:t>•  PAERA v1.0 — §2.3 Role of Enterprise Architecture</a:t>
+            </a:r>
+          </a:p>
+          <a:p>
+            <a:pPr>
+              <a:spcAft>
+                <a:spcPts val="1200"/>
+              </a:spcAft>
+            </a:pPr>
+            <a:r>
+              <a:rPr sz="1700" b="0" i="0">
+                <a:solidFill>
+                  <a:srgbClr val="1A1A1A"/>
+                </a:solidFill>
+                <a:latin typeface="Arial"/>
+              </a:rPr>
+              <a:t>•  TOGAF — BDAT layering reference</a:t>
+            </a:r>
+          </a:p>
+        </p:txBody>
+      </p:sp>
+      <p:sp>
+        <p:nvSpPr>
+          <p:cNvPr id="5" name="TextBox 4"/>
+          <p:cNvSpPr txBox="1"/>
+          <p:nvPr/>
+        </p:nvSpPr>
+        <p:spPr>
+          <a:xfrm>
+            <a:off x="658368" y="5806440"/>
+            <a:ext cx="10789920" cy="457200"/>
+          </a:xfrm>
+          <a:prstGeom prst="rect">
+            <a:avLst/>
+          </a:prstGeom>
+          <a:noFill/>
+        </p:spPr>
+        <p:txBody>
+          <a:bodyPr wrap="square">
+            <a:spAutoFit/>
+          </a:bodyPr>
+          <a:lstStyle/>
+          <a:p>
+            <a:r>
+              <a:rPr sz="1400" b="1" i="0">
+                <a:solidFill>
+                  <a:srgbClr val="006E96"/>
+                </a:solidFill>
+                <a:latin typeface="Arial"/>
+              </a:rPr>
+              <a:t>Find the link in the description.</a:t>
+            </a:r>
+          </a:p>
+        </p:txBody>
+      </p:sp>
+      <p:sp>
+        <p:nvSpPr>
+          <p:cNvPr id="6" name="TextBox 5"/>
+          <p:cNvSpPr txBox="1"/>
+          <p:nvPr/>
+        </p:nvSpPr>
+        <p:spPr>
+          <a:xfrm>
+            <a:off x="457200" y="6473952"/>
+            <a:ext cx="7772400" cy="292608"/>
+          </a:xfrm>
+          <a:prstGeom prst="rect">
+            <a:avLst/>
+          </a:prstGeom>
+          <a:noFill/>
+        </p:spPr>
+        <p:txBody>
+          <a:bodyPr wrap="square">
+            <a:spAutoFit/>
+          </a:bodyPr>
+          <a:lstStyle/>
+          <a:p>
+            <a:r>
+              <a:rPr sz="900" b="0" i="0">
                 <a:solidFill>
                   <a:srgbClr val="595959"/>
                 </a:solidFill>
                 <a:latin typeface="Arial"/>
               </a:rPr>
-              <a:t>An EA is the picture everyone agrees describes your government — minister, ministry CIO, donor, vendor. With it, you can lead the conversation. Without it, others lead it for you.</a:t>
-            </a:r>
-          </a:p>
-        </p:txBody>
-      </p:sp>
-      <p:sp>
-        <p:nvSpPr>
-          <p:cNvPr id="6" name="TextBox 5"/>
-          <p:cNvSpPr txBox="1"/>
-          <p:nvPr/>
-        </p:nvSpPr>
-        <p:spPr>
-          <a:xfrm>
-            <a:off x="822960" y="5989320"/>
-            <a:ext cx="7315200" cy="365760"/>
-          </a:xfrm>
-          <a:prstGeom prst="rect">
-            <a:avLst/>
-          </a:prstGeom>
-          <a:noFill/>
-        </p:spPr>
-        <p:txBody>
-          <a:bodyPr wrap="square">
-            <a:spAutoFit/>
-          </a:bodyPr>
-          <a:lstStyle/>
-          <a:p>
-            <a:r>
-              <a:rPr sz="1200" b="0" i="0">
-                <a:solidFill>
-                  <a:srgbClr val="595959"/>
-                </a:solidFill>
-                <a:latin typeface="Arial"/>
-              </a:rPr>
-              <a:t>standalone video · voice-over on text slides</a:t>
+              <a:t>1.2 · What an EA actually is</a:t>
             </a:r>
           </a:p>
         </p:txBody>
@@ -14430,58 +13976,14 @@
       <p:grpSpPr/>
       <p:sp>
         <p:nvSpPr>
-          <p:cNvPr id="2" name="Rectangle 1"/>
-          <p:cNvSpPr/>
-          <p:nvPr/>
-        </p:nvSpPr>
-        <p:spPr>
-          <a:xfrm>
-            <a:off x="457200" y="384048"/>
-            <a:ext cx="45720" cy="256032"/>
-          </a:xfrm>
-          <a:prstGeom prst="rect">
-            <a:avLst/>
-          </a:prstGeom>
-          <a:solidFill>
-            <a:srgbClr val="009CD6"/>
-          </a:solidFill>
-          <a:ln>
-            <a:noFill/>
-          </a:ln>
-          <a:effectLst/>
-        </p:spPr>
-        <p:style>
-          <a:lnRef idx="1">
-            <a:schemeClr val="accent1"/>
-          </a:lnRef>
-          <a:fillRef idx="3">
-            <a:schemeClr val="accent1"/>
-          </a:fillRef>
-          <a:effectRef idx="2">
-            <a:schemeClr val="accent1"/>
-          </a:effectRef>
-          <a:fontRef idx="minor">
-            <a:schemeClr val="lt1"/>
-          </a:fontRef>
-        </p:style>
-        <p:txBody>
-          <a:bodyPr rtlCol="0" anchor="ctr"/>
-          <a:lstStyle/>
-          <a:p>
-            <a:pPr algn="ctr"/>
-          </a:p>
-        </p:txBody>
-      </p:sp>
-      <p:sp>
-        <p:nvSpPr>
-          <p:cNvPr id="3" name="TextBox 2"/>
+          <p:cNvPr id="2" name="TextBox 1"/>
           <p:cNvSpPr txBox="1"/>
           <p:nvPr/>
         </p:nvSpPr>
         <p:spPr>
           <a:xfrm>
-            <a:off x="621792" y="274320"/>
-            <a:ext cx="11247120" cy="914400"/>
+            <a:off x="822960" y="822960"/>
+            <a:ext cx="7315200" cy="457200"/>
           </a:xfrm>
           <a:prstGeom prst="rect">
             <a:avLst/>
@@ -14495,60 +13997,82 @@
           <a:lstStyle/>
           <a:p>
             <a:r>
-              <a:rPr sz="2800" b="1" i="0">
+              <a:rPr sz="1200" b="1" i="0">
+                <a:solidFill>
+                  <a:srgbClr val="595959"/>
+                </a:solidFill>
+                <a:latin typeface="Arial"/>
+              </a:rPr>
+              <a:t>KP1 · MODULE 1 · VIDEO 1.2</a:t>
+            </a:r>
+          </a:p>
+        </p:txBody>
+      </p:sp>
+      <p:sp>
+        <p:nvSpPr>
+          <p:cNvPr id="3" name="TextBox 2"/>
+          <p:cNvSpPr txBox="1"/>
+          <p:nvPr/>
+        </p:nvSpPr>
+        <p:spPr>
+          <a:xfrm>
+            <a:off x="822960" y="1828800"/>
+            <a:ext cx="2011680" cy="1097280"/>
+          </a:xfrm>
+          <a:prstGeom prst="rect">
+            <a:avLst/>
+          </a:prstGeom>
+          <a:noFill/>
+        </p:spPr>
+        <p:txBody>
+          <a:bodyPr wrap="square">
+            <a:spAutoFit/>
+          </a:bodyPr>
+          <a:lstStyle/>
+          <a:p>
+            <a:r>
+              <a:rPr sz="6000" b="1" i="0">
+                <a:solidFill>
+                  <a:srgbClr val="009CD6"/>
+                </a:solidFill>
+                <a:latin typeface="Arial"/>
+              </a:rPr>
+              <a:t>1.2</a:t>
+            </a:r>
+          </a:p>
+        </p:txBody>
+      </p:sp>
+      <p:sp>
+        <p:nvSpPr>
+          <p:cNvPr id="4" name="TextBox 3"/>
+          <p:cNvSpPr txBox="1"/>
+          <p:nvPr/>
+        </p:nvSpPr>
+        <p:spPr>
+          <a:xfrm>
+            <a:off x="822960" y="2880360"/>
+            <a:ext cx="9601200" cy="1371600"/>
+          </a:xfrm>
+          <a:prstGeom prst="rect">
+            <a:avLst/>
+          </a:prstGeom>
+          <a:noFill/>
+        </p:spPr>
+        <p:txBody>
+          <a:bodyPr wrap="square">
+            <a:spAutoFit/>
+          </a:bodyPr>
+          <a:lstStyle/>
+          <a:p>
+            <a:r>
+              <a:rPr sz="3400" b="1" i="0">
                 <a:solidFill>
                   <a:srgbClr val="1A1A1A"/>
                 </a:solidFill>
                 <a:latin typeface="Arial"/>
               </a:rPr>
-              <a:t>An EA is the agreed picture — not software you buy</a:t>
-            </a:r>
-          </a:p>
-        </p:txBody>
-      </p:sp>
-      <p:sp>
-        <p:nvSpPr>
-          <p:cNvPr id="4" name="Rounded Rectangle 3"/>
-          <p:cNvSpPr/>
-          <p:nvPr/>
-        </p:nvSpPr>
-        <p:spPr>
-          <a:xfrm>
-            <a:off x="658368" y="1600200"/>
-            <a:ext cx="5394960" cy="4297680"/>
-          </a:xfrm>
-          <a:prstGeom prst="roundRect">
-            <a:avLst>
-              <a:gd name="adj" fmla="val 4500"/>
-            </a:avLst>
-          </a:prstGeom>
-          <a:solidFill>
-            <a:srgbClr val="E5F5FB"/>
-          </a:solidFill>
-          <a:ln>
-            <a:noFill/>
-          </a:ln>
-          <a:effectLst/>
-        </p:spPr>
-        <p:style>
-          <a:lnRef idx="1">
-            <a:schemeClr val="accent1"/>
-          </a:lnRef>
-          <a:fillRef idx="3">
-            <a:schemeClr val="accent1"/>
-          </a:fillRef>
-          <a:effectRef idx="2">
-            <a:schemeClr val="accent1"/>
-          </a:effectRef>
-          <a:fontRef idx="minor">
-            <a:schemeClr val="lt1"/>
-          </a:fontRef>
-        </p:style>
-        <p:txBody>
-          <a:bodyPr rtlCol="0" anchor="ctr"/>
-          <a:lstStyle/>
-          <a:p>
-            <a:pPr algn="ctr"/>
+              <a:t>What an EA actually is</a:t>
+            </a:r>
           </a:p>
         </p:txBody>
       </p:sp>
@@ -14560,8 +14084,8 @@
         </p:nvSpPr>
         <p:spPr>
           <a:xfrm>
-            <a:off x="859536" y="1746504"/>
-            <a:ext cx="4992624" cy="4023360"/>
+            <a:off x="822960" y="4343400"/>
+            <a:ext cx="9875520" cy="1554480"/>
           </a:xfrm>
           <a:prstGeom prst="rect">
             <a:avLst/>
@@ -14574,214 +14098,28 @@
           </a:bodyPr>
           <a:lstStyle/>
           <a:p>
-            <a:pPr>
-              <a:spcAft>
-                <a:spcPts val="700"/>
-              </a:spcAft>
-            </a:pPr>
-            <a:r>
-              <a:rPr sz="2000" b="1" i="0">
-                <a:solidFill>
-                  <a:srgbClr val="006E96"/>
-                </a:solidFill>
-                <a:latin typeface="Arial"/>
-              </a:rPr>
-              <a:t>An EA is</a:t>
-            </a:r>
-          </a:p>
-          <a:p>
-            <a:pPr>
-              <a:spcAft>
-                <a:spcPts val="700"/>
-              </a:spcAft>
-            </a:pPr>
-            <a:r>
-              <a:rPr sz="1700" b="0" i="0">
-                <a:solidFill>
-                  <a:srgbClr val="1A1A1A"/>
-                </a:solidFill>
-                <a:latin typeface="Arial"/>
-              </a:rPr>
-              <a:t>the agreed picture of your government</a:t>
-            </a:r>
-          </a:p>
-          <a:p>
-            <a:pPr>
-              <a:spcAft>
-                <a:spcPts val="700"/>
-              </a:spcAft>
-            </a:pPr>
-            <a:r>
-              <a:rPr sz="1700" b="0" i="0">
-                <a:solidFill>
-                  <a:srgbClr val="1A1A1A"/>
-                </a:solidFill>
-                <a:latin typeface="Arial"/>
-              </a:rPr>
-              <a:t>a set of documents and diagrams</a:t>
-            </a:r>
-          </a:p>
-          <a:p>
-            <a:pPr>
-              <a:spcAft>
-                <a:spcPts val="700"/>
-              </a:spcAft>
-            </a:pPr>
-            <a:r>
-              <a:rPr sz="1700" b="0" i="0">
-                <a:solidFill>
-                  <a:srgbClr val="1A1A1A"/>
-                </a:solidFill>
-                <a:latin typeface="Arial"/>
-              </a:rPr>
-              <a:t>the same description everyone uses — minister, CIO, donor, vendor</a:t>
-            </a:r>
-          </a:p>
-        </p:txBody>
-      </p:sp>
-      <p:sp>
-        <p:nvSpPr>
-          <p:cNvPr id="6" name="Rounded Rectangle 5"/>
-          <p:cNvSpPr/>
-          <p:nvPr/>
-        </p:nvSpPr>
-        <p:spPr>
-          <a:xfrm>
-            <a:off x="6281928" y="1600200"/>
-            <a:ext cx="5394960" cy="4297680"/>
-          </a:xfrm>
-          <a:prstGeom prst="roundRect">
-            <a:avLst>
-              <a:gd name="adj" fmla="val 4500"/>
-            </a:avLst>
-          </a:prstGeom>
-          <a:solidFill>
-            <a:srgbClr val="F2F2F2"/>
-          </a:solidFill>
-          <a:ln>
-            <a:noFill/>
-          </a:ln>
-          <a:effectLst/>
-        </p:spPr>
-        <p:style>
-          <a:lnRef idx="1">
-            <a:schemeClr val="accent1"/>
-          </a:lnRef>
-          <a:fillRef idx="3">
-            <a:schemeClr val="accent1"/>
-          </a:fillRef>
-          <a:effectRef idx="2">
-            <a:schemeClr val="accent1"/>
-          </a:effectRef>
-          <a:fontRef idx="minor">
-            <a:schemeClr val="lt1"/>
-          </a:fontRef>
-        </p:style>
-        <p:txBody>
-          <a:bodyPr rtlCol="0" anchor="ctr"/>
-          <a:lstStyle/>
-          <a:p>
-            <a:pPr algn="ctr"/>
-          </a:p>
-        </p:txBody>
-      </p:sp>
-      <p:sp>
-        <p:nvSpPr>
-          <p:cNvPr id="7" name="TextBox 6"/>
-          <p:cNvSpPr txBox="1"/>
-          <p:nvPr/>
-        </p:nvSpPr>
-        <p:spPr>
-          <a:xfrm>
-            <a:off x="6483096" y="1746504"/>
-            <a:ext cx="4992624" cy="4023360"/>
-          </a:xfrm>
-          <a:prstGeom prst="rect">
-            <a:avLst/>
-          </a:prstGeom>
-          <a:noFill/>
-        </p:spPr>
-        <p:txBody>
-          <a:bodyPr wrap="square">
-            <a:spAutoFit/>
-          </a:bodyPr>
-          <a:lstStyle/>
-          <a:p>
-            <a:pPr>
-              <a:spcAft>
-                <a:spcPts val="700"/>
-              </a:spcAft>
-            </a:pPr>
-            <a:r>
-              <a:rPr sz="2000" b="1" i="0">
+            <a:r>
+              <a:rPr sz="1700" b="0" i="1">
                 <a:solidFill>
                   <a:srgbClr val="595959"/>
                 </a:solidFill>
                 <a:latin typeface="Arial"/>
               </a:rPr>
-              <a:t>An EA is not</a:t>
-            </a:r>
-          </a:p>
-          <a:p>
-            <a:pPr>
-              <a:spcAft>
-                <a:spcPts val="700"/>
-              </a:spcAft>
-            </a:pPr>
-            <a:r>
-              <a:rPr sz="1700" b="0" i="0">
-                <a:solidFill>
-                  <a:srgbClr val="1A1A1A"/>
-                </a:solidFill>
-                <a:latin typeface="Arial"/>
-              </a:rPr>
-              <a:t>software</a:t>
-            </a:r>
-          </a:p>
-          <a:p>
-            <a:pPr>
-              <a:spcAft>
-                <a:spcPts val="700"/>
-              </a:spcAft>
-            </a:pPr>
-            <a:r>
-              <a:rPr sz="1700" b="0" i="0">
-                <a:solidFill>
-                  <a:srgbClr val="1A1A1A"/>
-                </a:solidFill>
-                <a:latin typeface="Arial"/>
-              </a:rPr>
-              <a:t>a vendor product</a:t>
-            </a:r>
-          </a:p>
-          <a:p>
-            <a:pPr>
-              <a:spcAft>
-                <a:spcPts val="700"/>
-              </a:spcAft>
-            </a:pPr>
-            <a:r>
-              <a:rPr sz="1700" b="0" i="0">
-                <a:solidFill>
-                  <a:srgbClr val="1A1A1A"/>
-                </a:solidFill>
-                <a:latin typeface="Arial"/>
-              </a:rPr>
-              <a:t>a tool you procure</a:t>
-            </a:r>
-          </a:p>
-        </p:txBody>
-      </p:sp>
-      <p:sp>
-        <p:nvSpPr>
-          <p:cNvPr id="8" name="TextBox 7"/>
+              <a:t>An EA is the picture everyone agrees describes your government — minister, ministry CIO, donor, vendor. With it, you can lead the conversation. Without it, others lead it for you.</a:t>
+            </a:r>
+          </a:p>
+        </p:txBody>
+      </p:sp>
+      <p:sp>
+        <p:nvSpPr>
+          <p:cNvPr id="6" name="TextBox 5"/>
           <p:cNvSpPr txBox="1"/>
           <p:nvPr/>
         </p:nvSpPr>
         <p:spPr>
           <a:xfrm>
-            <a:off x="457200" y="6473952"/>
-            <a:ext cx="7772400" cy="292608"/>
+            <a:off x="822960" y="5989320"/>
+            <a:ext cx="7315200" cy="365760"/>
           </a:xfrm>
           <a:prstGeom prst="rect">
             <a:avLst/>
@@ -14795,13 +14133,13 @@
           <a:lstStyle/>
           <a:p>
             <a:r>
-              <a:rPr sz="900" b="0" i="0">
+              <a:rPr sz="1200" b="0" i="0">
                 <a:solidFill>
                   <a:srgbClr val="595959"/>
                 </a:solidFill>
                 <a:latin typeface="Arial"/>
               </a:rPr>
-              <a:t>1.2 · What an EA actually is</a:t>
+              <a:t>standalone video · voice-over on text slides</a:t>
             </a:r>
           </a:p>
         </p:txBody>

--- a/10-Knowledge-Products/KP1-GEA/videos/module_1/en/decks/KP1_M1_1.2_Deck_v0.2.pptx
+++ b/10-Knowledge-Products/KP1-GEA/videos/module_1/en/decks/KP1_M1_1.2_Deck_v0.2.pptx
@@ -14003,7 +14003,7 @@
                 </a:solidFill>
                 <a:latin typeface="Arial"/>
               </a:rPr>
-              <a:t>KP1 · MODULE 1 · VIDEO 1.2</a:t>
+              <a:t>MODULE 1 · VIDEO 1.2</a:t>
             </a:r>
           </a:p>
         </p:txBody>
